--- a/figures/ppt/技术耦合-精简.pptx
+++ b/figures/ppt/技术耦合-精简.pptx
@@ -4119,23 +4119,29 @@
       </p:sp>
       <p:sp>
         <p:nvSpPr>
-          <p:cNvPr id="48" name="右箭头 47"/>
+          <p:cNvPr id="49" name="矩形 48"/>
           <p:cNvSpPr/>
           <p:nvPr/>
         </p:nvSpPr>
         <p:spPr>
-          <a:xfrm rot="2220000">
-            <a:off x="3966210" y="3914775"/>
-            <a:ext cx="1562100" cy="583565"/>
-          </a:xfrm>
-          <a:prstGeom prst="rightArrow">
+          <a:xfrm>
+            <a:off x="8973820" y="2918460"/>
+            <a:ext cx="1636395" cy="706755"/>
+          </a:xfrm>
+          <a:prstGeom prst="rect">
             <a:avLst/>
           </a:prstGeom>
           <a:solidFill>
-            <a:schemeClr val="accent1">
-              <a:alpha val="64000"/>
+            <a:schemeClr val="accent6">
+              <a:lumMod val="20000"/>
+              <a:lumOff val="80000"/>
             </a:schemeClr>
           </a:solidFill>
+          <a:ln w="22225">
+            <a:solidFill>
+              <a:schemeClr val="tx1"/>
+            </a:solidFill>
+          </a:ln>
         </p:spPr>
         <p:style>
           <a:lnRef idx="2">
@@ -4157,34 +4163,50 @@
           <a:bodyPr rtlCol="0" anchor="ctr"/>
           <a:p>
             <a:pPr algn="ctr"/>
-            <a:endParaRPr lang="zh-CN" altLang="en-US"/>
-          </a:p>
-        </p:txBody>
-      </p:sp>
-      <p:sp>
-        <p:nvSpPr>
-          <p:cNvPr id="49" name="矩形 48"/>
+            <a:r>
+              <a:rPr lang="en-US" altLang="zh-CN">
+                <a:solidFill>
+                  <a:schemeClr val="tx1"/>
+                </a:solidFill>
+              </a:rPr>
+              <a:t>MAC</a:t>
+            </a:r>
+            <a:r>
+              <a:rPr lang="zh-CN" altLang="en-US">
+                <a:solidFill>
+                  <a:schemeClr val="tx1"/>
+                </a:solidFill>
+              </a:rPr>
+              <a:t>调度器</a:t>
+            </a:r>
+            <a:endParaRPr lang="zh-CN" altLang="en-US">
+              <a:solidFill>
+                <a:schemeClr val="tx1"/>
+              </a:solidFill>
+            </a:endParaRPr>
+          </a:p>
+        </p:txBody>
+      </p:sp>
+      <p:sp>
+        <p:nvSpPr>
+          <p:cNvPr id="50" name="矩形 49"/>
           <p:cNvSpPr/>
           <p:nvPr/>
         </p:nvSpPr>
         <p:spPr>
           <a:xfrm>
-            <a:off x="8973820" y="2918460"/>
-            <a:ext cx="1636395" cy="706755"/>
+            <a:off x="8699500" y="1657985"/>
+            <a:ext cx="2221230" cy="2031365"/>
           </a:xfrm>
           <a:prstGeom prst="rect">
             <a:avLst/>
           </a:prstGeom>
-          <a:solidFill>
-            <a:schemeClr val="accent6">
-              <a:lumMod val="20000"/>
-              <a:lumOff val="80000"/>
-            </a:schemeClr>
-          </a:solidFill>
-          <a:ln w="22225">
+          <a:noFill/>
+          <a:ln w="19050">
             <a:solidFill>
               <a:schemeClr val="tx1"/>
             </a:solidFill>
+            <a:prstDash val="dash"/>
           </a:ln>
         </p:spPr>
         <p:style>
@@ -4207,50 +4229,67 @@
           <a:bodyPr rtlCol="0" anchor="ctr"/>
           <a:p>
             <a:pPr algn="ctr"/>
-            <a:r>
-              <a:rPr lang="en-US" altLang="zh-CN">
-                <a:solidFill>
-                  <a:schemeClr val="tx1"/>
-                </a:solidFill>
-              </a:rPr>
-              <a:t>MAC</a:t>
-            </a:r>
-            <a:r>
-              <a:rPr lang="zh-CN" altLang="en-US">
-                <a:solidFill>
-                  <a:schemeClr val="tx1"/>
-                </a:solidFill>
-              </a:rPr>
-              <a:t>调度器</a:t>
-            </a:r>
-            <a:endParaRPr lang="zh-CN" altLang="en-US">
-              <a:solidFill>
-                <a:schemeClr val="tx1"/>
-              </a:solidFill>
-            </a:endParaRPr>
-          </a:p>
-        </p:txBody>
-      </p:sp>
-      <p:sp>
-        <p:nvSpPr>
-          <p:cNvPr id="50" name="矩形 49"/>
-          <p:cNvSpPr/>
+            <a:endParaRPr lang="zh-CN" altLang="en-US"/>
+          </a:p>
+        </p:txBody>
+      </p:sp>
+      <p:sp>
+        <p:nvSpPr>
+          <p:cNvPr id="51" name="文本框 50"/>
+          <p:cNvSpPr txBox="1"/>
           <p:nvPr/>
         </p:nvSpPr>
         <p:spPr>
           <a:xfrm>
-            <a:off x="8699500" y="1657985"/>
-            <a:ext cx="2221230" cy="2031365"/>
+            <a:off x="8743315" y="1657985"/>
+            <a:ext cx="1179830" cy="368300"/>
           </a:xfrm>
           <a:prstGeom prst="rect">
             <a:avLst/>
           </a:prstGeom>
           <a:noFill/>
-          <a:ln w="19050">
+        </p:spPr>
+        <p:txBody>
+          <a:bodyPr wrap="square" rtlCol="0">
+            <a:spAutoFit/>
+          </a:bodyPr>
+          <a:p>
+            <a:r>
+              <a:rPr lang="zh-CN" altLang="en-US" b="1"/>
+              <a:t>接入</a:t>
+            </a:r>
+            <a:r>
+              <a:rPr lang="zh-CN" altLang="en-US" b="1"/>
+              <a:t>卫星</a:t>
+            </a:r>
+            <a:endParaRPr lang="zh-CN" altLang="en-US" b="1"/>
+          </a:p>
+        </p:txBody>
+      </p:sp>
+      <p:sp>
+        <p:nvSpPr>
+          <p:cNvPr id="52" name="矩形 51"/>
+          <p:cNvSpPr/>
+          <p:nvPr/>
+        </p:nvSpPr>
+        <p:spPr>
+          <a:xfrm>
+            <a:off x="8973820" y="2105025"/>
+            <a:ext cx="1636395" cy="706755"/>
+          </a:xfrm>
+          <a:prstGeom prst="rect">
+            <a:avLst/>
+          </a:prstGeom>
+          <a:solidFill>
+            <a:schemeClr val="accent6">
+              <a:lumMod val="20000"/>
+              <a:lumOff val="80000"/>
+            </a:schemeClr>
+          </a:solidFill>
+          <a:ln w="22225">
             <a:solidFill>
               <a:schemeClr val="tx1"/>
             </a:solidFill>
-            <a:prstDash val="dash"/>
           </a:ln>
         </p:spPr>
         <p:style>
@@ -4273,68 +4312,49 @@
           <a:bodyPr rtlCol="0" anchor="ctr"/>
           <a:p>
             <a:pPr algn="ctr"/>
-            <a:endParaRPr lang="zh-CN" altLang="en-US"/>
-          </a:p>
-        </p:txBody>
-      </p:sp>
-      <p:sp>
-        <p:nvSpPr>
-          <p:cNvPr id="51" name="文本框 50"/>
-          <p:cNvSpPr txBox="1"/>
-          <p:nvPr/>
-        </p:nvSpPr>
-        <p:spPr>
-          <a:xfrm>
-            <a:off x="8743315" y="1657985"/>
-            <a:ext cx="1179830" cy="368300"/>
-          </a:xfrm>
-          <a:prstGeom prst="rect">
-            <a:avLst/>
-          </a:prstGeom>
-          <a:noFill/>
-        </p:spPr>
-        <p:txBody>
-          <a:bodyPr wrap="square" rtlCol="0">
-            <a:spAutoFit/>
-          </a:bodyPr>
-          <a:p>
-            <a:r>
-              <a:rPr lang="zh-CN" altLang="en-US" b="1"/>
-              <a:t>接入</a:t>
-            </a:r>
-            <a:r>
-              <a:rPr lang="zh-CN" altLang="en-US" b="1"/>
-              <a:t>卫星</a:t>
-            </a:r>
-            <a:endParaRPr lang="zh-CN" altLang="en-US" b="1"/>
-          </a:p>
-        </p:txBody>
-      </p:sp>
-      <p:sp>
-        <p:nvSpPr>
-          <p:cNvPr id="52" name="矩形 51"/>
+            <a:r>
+              <a:rPr lang="zh-CN" altLang="en-US">
+                <a:solidFill>
+                  <a:schemeClr val="tx1"/>
+                </a:solidFill>
+              </a:rPr>
+              <a:t>切片</a:t>
+            </a:r>
+            <a:r>
+              <a:rPr lang="zh-CN" altLang="en-US">
+                <a:solidFill>
+                  <a:schemeClr val="tx1"/>
+                </a:solidFill>
+              </a:rPr>
+              <a:t>调度器</a:t>
+            </a:r>
+            <a:endParaRPr lang="zh-CN" altLang="en-US">
+              <a:solidFill>
+                <a:schemeClr val="tx1"/>
+              </a:solidFill>
+            </a:endParaRPr>
+          </a:p>
+        </p:txBody>
+      </p:sp>
+      <p:sp>
+        <p:nvSpPr>
+          <p:cNvPr id="53" name="右箭头 52"/>
           <p:cNvSpPr/>
           <p:nvPr/>
         </p:nvSpPr>
         <p:spPr>
-          <a:xfrm>
-            <a:off x="8973820" y="2105025"/>
-            <a:ext cx="1636395" cy="706755"/>
-          </a:xfrm>
-          <a:prstGeom prst="rect">
+          <a:xfrm rot="19380000">
+            <a:off x="7919720" y="3758565"/>
+            <a:ext cx="1035685" cy="583565"/>
+          </a:xfrm>
+          <a:prstGeom prst="rightArrow">
             <a:avLst/>
           </a:prstGeom>
           <a:solidFill>
-            <a:schemeClr val="accent6">
-              <a:lumMod val="20000"/>
-              <a:lumOff val="80000"/>
+            <a:schemeClr val="accent1">
+              <a:alpha val="64000"/>
             </a:schemeClr>
           </a:solidFill>
-          <a:ln w="22225">
-            <a:solidFill>
-              <a:schemeClr val="tx1"/>
-            </a:solidFill>
-          </a:ln>
         </p:spPr>
         <p:style>
           <a:lnRef idx="2">
@@ -4356,49 +4376,35 @@
           <a:bodyPr rtlCol="0" anchor="ctr"/>
           <a:p>
             <a:pPr algn="ctr"/>
-            <a:r>
-              <a:rPr lang="zh-CN" altLang="en-US">
-                <a:solidFill>
-                  <a:schemeClr val="tx1"/>
-                </a:solidFill>
-              </a:rPr>
-              <a:t>切片</a:t>
-            </a:r>
-            <a:r>
-              <a:rPr lang="zh-CN" altLang="en-US">
-                <a:solidFill>
-                  <a:schemeClr val="tx1"/>
-                </a:solidFill>
-              </a:rPr>
-              <a:t>调度器</a:t>
-            </a:r>
-            <a:endParaRPr lang="zh-CN" altLang="en-US">
-              <a:solidFill>
-                <a:schemeClr val="tx1"/>
-              </a:solidFill>
-            </a:endParaRPr>
-          </a:p>
-        </p:txBody>
-      </p:sp>
-      <p:sp>
-        <p:nvSpPr>
-          <p:cNvPr id="53" name="右箭头 52"/>
+            <a:endParaRPr lang="zh-CN" altLang="en-US"/>
+          </a:p>
+        </p:txBody>
+      </p:sp>
+      <p:sp>
+        <p:nvSpPr>
+          <p:cNvPr id="2" name="矩形 1"/>
           <p:cNvSpPr/>
           <p:nvPr/>
         </p:nvSpPr>
         <p:spPr>
-          <a:xfrm rot="19380000">
-            <a:off x="7919720" y="3758565"/>
-            <a:ext cx="1035685" cy="583565"/>
-          </a:xfrm>
-          <a:prstGeom prst="rightArrow">
+          <a:xfrm>
+            <a:off x="8955405" y="4579620"/>
+            <a:ext cx="1636395" cy="706755"/>
+          </a:xfrm>
+          <a:prstGeom prst="rect">
             <a:avLst/>
           </a:prstGeom>
           <a:solidFill>
-            <a:schemeClr val="accent1">
-              <a:alpha val="64000"/>
+            <a:schemeClr val="accent5">
+              <a:lumMod val="20000"/>
+              <a:lumOff val="80000"/>
             </a:schemeClr>
           </a:solidFill>
+          <a:ln w="22225">
+            <a:solidFill>
+              <a:schemeClr val="tx1"/>
+            </a:solidFill>
+          </a:ln>
         </p:spPr>
         <p:style>
           <a:lnRef idx="2">
@@ -4420,26 +4426,48 @@
           <a:bodyPr rtlCol="0" anchor="ctr"/>
           <a:p>
             <a:pPr algn="ctr"/>
-            <a:endParaRPr lang="zh-CN" altLang="en-US"/>
-          </a:p>
-        </p:txBody>
-      </p:sp>
-      <p:sp>
-        <p:nvSpPr>
-          <p:cNvPr id="2" name="矩形 1"/>
+            <a:r>
+              <a:rPr lang="zh-CN" altLang="en-US">
+                <a:solidFill>
+                  <a:schemeClr val="tx1"/>
+                </a:solidFill>
+                <a:sym typeface="+mn-ea"/>
+              </a:rPr>
+              <a:t>信源信道联合</a:t>
+            </a:r>
+            <a:r>
+              <a:rPr lang="zh-CN" altLang="en-US">
+                <a:solidFill>
+                  <a:schemeClr val="tx1"/>
+                </a:solidFill>
+                <a:sym typeface="+mn-ea"/>
+              </a:rPr>
+              <a:t>解码器</a:t>
+            </a:r>
+            <a:endParaRPr lang="zh-CN" altLang="en-US">
+              <a:solidFill>
+                <a:schemeClr val="tx1"/>
+              </a:solidFill>
+            </a:endParaRPr>
+          </a:p>
+        </p:txBody>
+      </p:sp>
+      <p:sp>
+        <p:nvSpPr>
+          <p:cNvPr id="3" name="矩形 2"/>
           <p:cNvSpPr/>
           <p:nvPr/>
         </p:nvSpPr>
         <p:spPr>
           <a:xfrm>
-            <a:off x="8955405" y="4579620"/>
+            <a:off x="8955405" y="5567045"/>
             <a:ext cx="1636395" cy="706755"/>
           </a:xfrm>
           <a:prstGeom prst="rect">
             <a:avLst/>
           </a:prstGeom>
           <a:solidFill>
-            <a:schemeClr val="accent5">
+            <a:schemeClr val="accent4">
               <a:lumMod val="20000"/>
               <a:lumOff val="80000"/>
             </a:schemeClr>
@@ -4475,18 +4503,16 @@
                 <a:solidFill>
                   <a:schemeClr val="tx1"/>
                 </a:solidFill>
-                <a:sym typeface="+mn-ea"/>
               </a:rPr>
-              <a:t>信源信道联合</a:t>
+              <a:t>切换</a:t>
             </a:r>
             <a:r>
               <a:rPr lang="zh-CN" altLang="en-US">
                 <a:solidFill>
                   <a:schemeClr val="tx1"/>
                 </a:solidFill>
-                <a:sym typeface="+mn-ea"/>
               </a:rPr>
-              <a:t>解码器</a:t>
+              <a:t>控制器</a:t>
             </a:r>
             <a:endParaRPr lang="zh-CN" altLang="en-US">
               <a:solidFill>
@@ -4498,28 +4524,24 @@
       </p:sp>
       <p:sp>
         <p:nvSpPr>
-          <p:cNvPr id="3" name="矩形 2"/>
+          <p:cNvPr id="4" name="矩形 3"/>
           <p:cNvSpPr/>
           <p:nvPr/>
         </p:nvSpPr>
         <p:spPr>
           <a:xfrm>
-            <a:off x="8955405" y="5567045"/>
-            <a:ext cx="1636395" cy="706755"/>
+            <a:off x="8867775" y="4458335"/>
+            <a:ext cx="2047875" cy="2250440"/>
           </a:xfrm>
           <a:prstGeom prst="rect">
             <a:avLst/>
           </a:prstGeom>
-          <a:solidFill>
-            <a:schemeClr val="accent4">
-              <a:lumMod val="20000"/>
-              <a:lumOff val="80000"/>
-            </a:schemeClr>
-          </a:solidFill>
-          <a:ln w="22225">
+          <a:noFill/>
+          <a:ln w="19050">
             <a:solidFill>
               <a:schemeClr val="tx1"/>
             </a:solidFill>
+            <a:prstDash val="dash"/>
           </a:ln>
         </p:spPr>
         <p:style>
@@ -4542,50 +4564,59 @@
           <a:bodyPr rtlCol="0" anchor="ctr"/>
           <a:p>
             <a:pPr algn="ctr"/>
-            <a:r>
-              <a:rPr lang="zh-CN" altLang="en-US">
-                <a:solidFill>
-                  <a:schemeClr val="tx1"/>
-                </a:solidFill>
-              </a:rPr>
-              <a:t>切换</a:t>
-            </a:r>
-            <a:r>
-              <a:rPr lang="zh-CN" altLang="en-US">
-                <a:solidFill>
-                  <a:schemeClr val="tx1"/>
-                </a:solidFill>
-              </a:rPr>
-              <a:t>控制器</a:t>
-            </a:r>
-            <a:endParaRPr lang="zh-CN" altLang="en-US">
-              <a:solidFill>
-                <a:schemeClr val="tx1"/>
-              </a:solidFill>
-            </a:endParaRPr>
-          </a:p>
-        </p:txBody>
-      </p:sp>
-      <p:sp>
-        <p:nvSpPr>
-          <p:cNvPr id="4" name="矩形 3"/>
-          <p:cNvSpPr/>
+            <a:endParaRPr lang="zh-CN" altLang="en-US"/>
+          </a:p>
+        </p:txBody>
+      </p:sp>
+      <p:sp>
+        <p:nvSpPr>
+          <p:cNvPr id="5" name="文本框 4"/>
+          <p:cNvSpPr txBox="1"/>
           <p:nvPr/>
         </p:nvSpPr>
         <p:spPr>
           <a:xfrm>
-            <a:off x="8867775" y="4458335"/>
-            <a:ext cx="2047875" cy="2250440"/>
+            <a:off x="9100185" y="6357620"/>
+            <a:ext cx="1491615" cy="368300"/>
           </a:xfrm>
           <a:prstGeom prst="rect">
             <a:avLst/>
           </a:prstGeom>
           <a:noFill/>
-          <a:ln w="19050">
+        </p:spPr>
+        <p:txBody>
+          <a:bodyPr wrap="square" rtlCol="0">
+            <a:spAutoFit/>
+          </a:bodyPr>
+          <a:p>
+            <a:pPr algn="ctr"/>
+            <a:r>
+              <a:rPr lang="zh-CN" altLang="en-US" b="1"/>
+              <a:t>接收端用户</a:t>
+            </a:r>
+            <a:endParaRPr lang="zh-CN" altLang="en-US" b="1"/>
+          </a:p>
+        </p:txBody>
+      </p:sp>
+      <p:sp>
+        <p:nvSpPr>
+          <p:cNvPr id="6" name="矩形 5"/>
+          <p:cNvSpPr/>
+          <p:nvPr/>
+        </p:nvSpPr>
+        <p:spPr>
+          <a:xfrm>
+            <a:off x="7693660" y="486410"/>
+            <a:ext cx="1636395" cy="706755"/>
+          </a:xfrm>
+          <a:prstGeom prst="rect">
+            <a:avLst/>
+          </a:prstGeom>
+          <a:noFill/>
+          <a:ln w="22225">
             <a:solidFill>
               <a:schemeClr val="tx1"/>
             </a:solidFill>
-            <a:prstDash val="dash"/>
           </a:ln>
         </p:spPr>
         <p:style>
@@ -4608,60 +4639,49 @@
           <a:bodyPr rtlCol="0" anchor="ctr"/>
           <a:p>
             <a:pPr algn="ctr"/>
-            <a:endParaRPr lang="zh-CN" altLang="en-US"/>
-          </a:p>
-        </p:txBody>
-      </p:sp>
-      <p:sp>
-        <p:nvSpPr>
-          <p:cNvPr id="5" name="文本框 4"/>
-          <p:cNvSpPr txBox="1"/>
+            <a:r>
+              <a:rPr lang="zh-CN" altLang="en-US">
+                <a:solidFill>
+                  <a:schemeClr val="tx1"/>
+                </a:solidFill>
+              </a:rPr>
+              <a:t>网络切片管理</a:t>
+            </a:r>
+            <a:r>
+              <a:rPr lang="zh-CN" altLang="en-US">
+                <a:solidFill>
+                  <a:schemeClr val="tx1"/>
+                </a:solidFill>
+              </a:rPr>
+              <a:t>功能</a:t>
+            </a:r>
+            <a:endParaRPr lang="zh-CN" altLang="en-US">
+              <a:solidFill>
+                <a:schemeClr val="tx1"/>
+              </a:solidFill>
+            </a:endParaRPr>
+          </a:p>
+        </p:txBody>
+      </p:sp>
+      <p:sp>
+        <p:nvSpPr>
+          <p:cNvPr id="8" name="右箭头 7"/>
+          <p:cNvSpPr/>
           <p:nvPr/>
         </p:nvSpPr>
         <p:spPr>
-          <a:xfrm>
-            <a:off x="9100185" y="6357620"/>
-            <a:ext cx="1491615" cy="368300"/>
-          </a:xfrm>
-          <a:prstGeom prst="rect">
+          <a:xfrm rot="5400000" flipV="1">
+            <a:off x="9542780" y="3990975"/>
+            <a:ext cx="534035" cy="583565"/>
+          </a:xfrm>
+          <a:prstGeom prst="rightArrow">
             <a:avLst/>
           </a:prstGeom>
-          <a:noFill/>
-        </p:spPr>
-        <p:txBody>
-          <a:bodyPr wrap="square" rtlCol="0">
-            <a:spAutoFit/>
-          </a:bodyPr>
-          <a:p>
-            <a:pPr algn="ctr"/>
-            <a:r>
-              <a:rPr lang="zh-CN" altLang="en-US" b="1"/>
-              <a:t>接收端用户</a:t>
-            </a:r>
-            <a:endParaRPr lang="zh-CN" altLang="en-US" b="1"/>
-          </a:p>
-        </p:txBody>
-      </p:sp>
-      <p:sp>
-        <p:nvSpPr>
-          <p:cNvPr id="6" name="矩形 5"/>
-          <p:cNvSpPr/>
-          <p:nvPr/>
-        </p:nvSpPr>
-        <p:spPr>
-          <a:xfrm>
-            <a:off x="7693660" y="486410"/>
-            <a:ext cx="1636395" cy="706755"/>
-          </a:xfrm>
-          <a:prstGeom prst="rect">
-            <a:avLst/>
-          </a:prstGeom>
-          <a:noFill/>
-          <a:ln w="22225">
-            <a:solidFill>
-              <a:schemeClr val="tx1"/>
-            </a:solidFill>
-          </a:ln>
+          <a:solidFill>
+            <a:schemeClr val="accent1">
+              <a:alpha val="64000"/>
+            </a:schemeClr>
+          </a:solidFill>
         </p:spPr>
         <p:style>
           <a:lnRef idx="2">
@@ -4683,70 +4703,6 @@
           <a:bodyPr rtlCol="0" anchor="ctr"/>
           <a:p>
             <a:pPr algn="ctr"/>
-            <a:r>
-              <a:rPr lang="zh-CN" altLang="en-US">
-                <a:solidFill>
-                  <a:schemeClr val="tx1"/>
-                </a:solidFill>
-              </a:rPr>
-              <a:t>网络切片管理</a:t>
-            </a:r>
-            <a:r>
-              <a:rPr lang="zh-CN" altLang="en-US">
-                <a:solidFill>
-                  <a:schemeClr val="tx1"/>
-                </a:solidFill>
-              </a:rPr>
-              <a:t>功能</a:t>
-            </a:r>
-            <a:endParaRPr lang="zh-CN" altLang="en-US">
-              <a:solidFill>
-                <a:schemeClr val="tx1"/>
-              </a:solidFill>
-            </a:endParaRPr>
-          </a:p>
-        </p:txBody>
-      </p:sp>
-      <p:sp>
-        <p:nvSpPr>
-          <p:cNvPr id="8" name="右箭头 7"/>
-          <p:cNvSpPr/>
-          <p:nvPr/>
-        </p:nvSpPr>
-        <p:spPr>
-          <a:xfrm rot="5400000" flipV="1">
-            <a:off x="9542780" y="3990975"/>
-            <a:ext cx="534035" cy="583565"/>
-          </a:xfrm>
-          <a:prstGeom prst="rightArrow">
-            <a:avLst/>
-          </a:prstGeom>
-          <a:solidFill>
-            <a:schemeClr val="accent1">
-              <a:alpha val="64000"/>
-            </a:schemeClr>
-          </a:solidFill>
-        </p:spPr>
-        <p:style>
-          <a:lnRef idx="2">
-            <a:schemeClr val="accent1">
-              <a:lumMod val="75000"/>
-            </a:schemeClr>
-          </a:lnRef>
-          <a:fillRef idx="1">
-            <a:schemeClr val="accent1"/>
-          </a:fillRef>
-          <a:effectRef idx="0">
-            <a:srgbClr val="FFFFFF"/>
-          </a:effectRef>
-          <a:fontRef idx="minor">
-            <a:schemeClr val="lt1"/>
-          </a:fontRef>
-        </p:style>
-        <p:txBody>
-          <a:bodyPr rtlCol="0" anchor="ctr"/>
-          <a:p>
-            <a:pPr algn="ctr"/>
             <a:endParaRPr lang="zh-CN" altLang="en-US"/>
           </a:p>
         </p:txBody>
@@ -4760,7 +4716,7 @@
         <p:spPr>
           <a:xfrm>
             <a:off x="3550285" y="5691505"/>
-            <a:ext cx="5549900" cy="645160"/>
+            <a:ext cx="5549900" cy="922020"/>
           </a:xfrm>
           <a:prstGeom prst="rect">
             <a:avLst/>
@@ -4793,7 +4749,25 @@
               <a:rPr lang="zh-CN" altLang="en-US" b="1">
                 <a:latin typeface="Calibri" panose="020F0502020204030204" charset="0"/>
               </a:rPr>
-              <a:t>接入切换与收发内容编解码</a:t>
+              <a:t>接入切换</a:t>
+            </a:r>
+            <a:endParaRPr lang="zh-CN" altLang="en-US" b="1">
+              <a:latin typeface="Calibri" panose="020F0502020204030204" charset="0"/>
+            </a:endParaRPr>
+          </a:p>
+          <a:p>
+            <a:pPr algn="ctr"/>
+            <a:r>
+              <a:rPr lang="zh-CN" altLang="en-US" b="1">
+                <a:latin typeface="Calibri" panose="020F0502020204030204" charset="0"/>
+              </a:rPr>
+              <a:t>（移动性管理</a:t>
+            </a:r>
+            <a:r>
+              <a:rPr lang="zh-CN" altLang="en-US" b="1">
+                <a:latin typeface="Calibri" panose="020F0502020204030204" charset="0"/>
+              </a:rPr>
+              <a:t>功能）</a:t>
             </a:r>
             <a:endParaRPr lang="zh-CN" altLang="en-US">
               <a:latin typeface="Calibri" panose="020F0502020204030204" charset="0"/>
@@ -4818,8 +4792,8 @@
         </p:nvSpPr>
         <p:spPr>
           <a:xfrm>
-            <a:off x="2233295" y="3803650"/>
-            <a:ext cx="2308860" cy="645160"/>
+            <a:off x="5462270" y="3803650"/>
+            <a:ext cx="2527300" cy="645160"/>
           </a:xfrm>
           <a:prstGeom prst="rect">
             <a:avLst/>
@@ -4852,7 +4826,13 @@
               <a:rPr lang="zh-CN" altLang="en-US" b="1">
                 <a:latin typeface="Calibri" panose="020F0502020204030204" charset="0"/>
               </a:rPr>
-              <a:t>端到端的语义</a:t>
+              <a:t>端到端可靠</a:t>
+            </a:r>
+            <a:r>
+              <a:rPr lang="zh-CN" altLang="en-US" b="1">
+                <a:latin typeface="Calibri" panose="020F0502020204030204" charset="0"/>
+              </a:rPr>
+              <a:t>传输</a:t>
             </a:r>
             <a:endParaRPr lang="zh-CN" altLang="en-US" b="1">
               <a:latin typeface="Calibri" panose="020F0502020204030204" charset="0"/>
@@ -4864,7 +4844,13 @@
               <a:rPr lang="zh-CN" altLang="en-US" b="1">
                 <a:latin typeface="Calibri" panose="020F0502020204030204" charset="0"/>
               </a:rPr>
-              <a:t>编解码与重传</a:t>
+              <a:t>（用户面数据承载</a:t>
+            </a:r>
+            <a:r>
+              <a:rPr lang="zh-CN" altLang="en-US" b="1">
+                <a:latin typeface="Calibri" panose="020F0502020204030204" charset="0"/>
+              </a:rPr>
+              <a:t>功能）</a:t>
             </a:r>
             <a:endParaRPr lang="zh-CN" altLang="en-US" b="1">
               <a:latin typeface="Calibri" panose="020F0502020204030204" charset="0"/>
@@ -4914,18 +4900,33 @@
               <a:rPr lang="zh-CN" altLang="en-US" b="1">
                 <a:latin typeface="Calibri" panose="020F0502020204030204" charset="0"/>
               </a:rPr>
-              <a:t>接入无线资源调度</a:t>
-            </a:r>
-            <a:endParaRPr lang="zh-CN" altLang="en-US">
+              <a:t>接入</a:t>
+            </a:r>
+            <a:r>
+              <a:rPr lang="zh-CN" altLang="en-US" b="1">
+                <a:latin typeface="Calibri" panose="020F0502020204030204" charset="0"/>
+              </a:rPr>
+              <a:t>侧无线资源调度</a:t>
+            </a:r>
+            <a:endParaRPr lang="zh-CN" altLang="en-US" b="1">
               <a:latin typeface="Calibri" panose="020F0502020204030204" charset="0"/>
             </a:endParaRPr>
           </a:p>
           <a:p>
             <a:pPr algn="ctr"/>
+            <a:r>
+              <a:rPr lang="zh-CN" altLang="en-US" b="1">
+                <a:latin typeface="Calibri" panose="020F0502020204030204" charset="0"/>
+              </a:rPr>
+              <a:t>（无线资源管理</a:t>
+            </a:r>
+            <a:r>
+              <a:rPr lang="zh-CN" altLang="en-US" b="1">
+                <a:latin typeface="Calibri" panose="020F0502020204030204" charset="0"/>
+              </a:rPr>
+              <a:t>功能）</a:t>
+            </a:r>
             <a:endParaRPr lang="zh-CN" altLang="en-US" b="1">
-              <a:solidFill>
-                <a:srgbClr val="FF0000"/>
-              </a:solidFill>
               <a:latin typeface="Calibri" panose="020F0502020204030204" charset="0"/>
             </a:endParaRPr>
           </a:p>
@@ -5378,8 +5379,8 @@
         </p:nvSpPr>
         <p:spPr>
           <a:xfrm>
-            <a:off x="3653790" y="4518025"/>
-            <a:ext cx="1389380" cy="706755"/>
+            <a:off x="3653790" y="4357370"/>
+            <a:ext cx="1389380" cy="1105535"/>
           </a:xfrm>
           <a:prstGeom prst="rect">
             <a:avLst/>
@@ -5439,7 +5440,7 @@
                   <a:schemeClr val="tx1"/>
                 </a:solidFill>
               </a:rPr>
-              <a:t>邻域感知</a:t>
+              <a:t>邻域感知模块（测量与上报</a:t>
             </a:r>
             <a:r>
               <a:rPr lang="zh-CN" altLang="en-US" b="1">
@@ -5447,7 +5448,7 @@
                   <a:schemeClr val="tx1"/>
                 </a:solidFill>
               </a:rPr>
-              <a:t>模块</a:t>
+              <a:t>功能）</a:t>
             </a:r>
             <a:endParaRPr lang="zh-CN" altLang="en-US" b="1">
               <a:solidFill>
@@ -5508,7 +5509,7 @@
           <a:prstGeom prst="straightConnector1">
             <a:avLst/>
           </a:prstGeom>
-          <a:ln w="22225">
+          <a:ln w="47625">
             <a:solidFill>
               <a:schemeClr val="bg1">
                 <a:lumMod val="50000"/>
@@ -5532,6 +5533,50 @@
           </a:fontRef>
         </p:style>
       </p:cxnSp>
+      <p:sp>
+        <p:nvSpPr>
+          <p:cNvPr id="48" name="右箭头 47"/>
+          <p:cNvSpPr/>
+          <p:nvPr/>
+        </p:nvSpPr>
+        <p:spPr>
+          <a:xfrm rot="2220000">
+            <a:off x="3966210" y="3914775"/>
+            <a:ext cx="1562100" cy="583565"/>
+          </a:xfrm>
+          <a:prstGeom prst="rightArrow">
+            <a:avLst/>
+          </a:prstGeom>
+          <a:solidFill>
+            <a:schemeClr val="accent1">
+              <a:alpha val="64000"/>
+            </a:schemeClr>
+          </a:solidFill>
+        </p:spPr>
+        <p:style>
+          <a:lnRef idx="2">
+            <a:schemeClr val="accent1">
+              <a:lumMod val="75000"/>
+            </a:schemeClr>
+          </a:lnRef>
+          <a:fillRef idx="1">
+            <a:schemeClr val="accent1"/>
+          </a:fillRef>
+          <a:effectRef idx="0">
+            <a:srgbClr val="FFFFFF"/>
+          </a:effectRef>
+          <a:fontRef idx="minor">
+            <a:schemeClr val="lt1"/>
+          </a:fontRef>
+        </p:style>
+        <p:txBody>
+          <a:bodyPr rtlCol="0" anchor="ctr"/>
+          <a:p>
+            <a:pPr algn="ctr"/>
+            <a:endParaRPr lang="zh-CN" altLang="en-US"/>
+          </a:p>
+        </p:txBody>
+      </p:sp>
     </p:spTree>
   </p:cSld>
   <p:clrMapOvr>

--- a/figures/ppt/技术耦合-精简.pptx
+++ b/figures/ppt/技术耦合-精简.pptx
@@ -112,7 +112,7 @@
             <a:srgbClr val="A4A3A4"/>
           </p15:clr>
         </p15:guide>
-        <p15:guide id="2" pos="3729" userDrawn="1">
+        <p15:guide id="2" pos="3710" userDrawn="1">
           <p15:clr>
             <a:srgbClr val="A4A3A4"/>
           </p15:clr>
@@ -2932,14 +2932,67 @@
       <p:grpSpPr/>
       <p:sp>
         <p:nvSpPr>
-          <p:cNvPr id="14" name="圆角矩形 13"/>
+          <p:cNvPr id="68" name="上箭头 67"/>
           <p:cNvSpPr/>
           <p:nvPr/>
         </p:nvSpPr>
         <p:spPr>
-          <a:xfrm>
-            <a:off x="1528445" y="2044065"/>
-            <a:ext cx="9203055" cy="1658620"/>
+          <a:xfrm rot="5400000">
+            <a:off x="5360670" y="-2726690"/>
+            <a:ext cx="1706245" cy="9660255"/>
+          </a:xfrm>
+          <a:prstGeom prst="upArrow">
+            <a:avLst/>
+          </a:prstGeom>
+          <a:solidFill>
+            <a:schemeClr val="accent5">
+              <a:lumMod val="20000"/>
+              <a:lumOff val="80000"/>
+              <a:alpha val="90000"/>
+            </a:schemeClr>
+          </a:solidFill>
+          <a:ln>
+            <a:solidFill>
+              <a:schemeClr val="bg1">
+                <a:lumMod val="85000"/>
+              </a:schemeClr>
+            </a:solidFill>
+          </a:ln>
+        </p:spPr>
+        <p:style>
+          <a:lnRef idx="2">
+            <a:schemeClr val="accent1">
+              <a:lumMod val="75000"/>
+            </a:schemeClr>
+          </a:lnRef>
+          <a:fillRef idx="1">
+            <a:schemeClr val="accent1"/>
+          </a:fillRef>
+          <a:effectRef idx="0">
+            <a:srgbClr val="FFFFFF"/>
+          </a:effectRef>
+          <a:fontRef idx="minor">
+            <a:schemeClr val="lt1"/>
+          </a:fontRef>
+        </p:style>
+        <p:txBody>
+          <a:bodyPr rtlCol="0" anchor="ctr"/>
+          <a:p>
+            <a:pPr algn="ctr"/>
+            <a:endParaRPr lang="zh-CN" altLang="en-US"/>
+          </a:p>
+        </p:txBody>
+      </p:sp>
+      <p:sp>
+        <p:nvSpPr>
+          <p:cNvPr id="35" name="圆角矩形 34"/>
+          <p:cNvSpPr/>
+          <p:nvPr/>
+        </p:nvSpPr>
+        <p:spPr>
+          <a:xfrm>
+            <a:off x="8700135" y="3187065"/>
+            <a:ext cx="2177415" cy="1722120"/>
           </a:xfrm>
           <a:prstGeom prst="roundRect">
             <a:avLst/>
@@ -2985,20 +3038,20 @@
       </p:sp>
       <p:sp>
         <p:nvSpPr>
-          <p:cNvPr id="12" name="圆角矩形 11"/>
+          <p:cNvPr id="14" name="圆角矩形 13"/>
           <p:cNvSpPr/>
           <p:nvPr/>
         </p:nvSpPr>
         <p:spPr>
           <a:xfrm>
-            <a:off x="1528445" y="3805555"/>
-            <a:ext cx="9203055" cy="1658620"/>
+            <a:off x="1528445" y="2957195"/>
+            <a:ext cx="2177415" cy="1951990"/>
           </a:xfrm>
           <a:prstGeom prst="roundRect">
             <a:avLst/>
           </a:prstGeom>
           <a:solidFill>
-            <a:schemeClr val="accent5">
+            <a:schemeClr val="accent6">
               <a:lumMod val="40000"/>
               <a:lumOff val="60000"/>
               <a:alpha val="48000"/>
@@ -3045,7 +3098,7 @@
         <p:spPr>
           <a:xfrm>
             <a:off x="1565910" y="5518150"/>
-            <a:ext cx="9203055" cy="930910"/>
+            <a:ext cx="2256155" cy="1227455"/>
           </a:xfrm>
           <a:prstGeom prst="roundRect">
             <a:avLst/>
@@ -3091,20 +3144,20 @@
       </p:sp>
       <p:sp>
         <p:nvSpPr>
-          <p:cNvPr id="21" name="矩形 20"/>
+          <p:cNvPr id="22" name="矩形 21"/>
           <p:cNvSpPr/>
           <p:nvPr/>
         </p:nvSpPr>
         <p:spPr>
           <a:xfrm>
-            <a:off x="1758950" y="4579620"/>
+            <a:off x="1839595" y="5567045"/>
             <a:ext cx="1636395" cy="706755"/>
           </a:xfrm>
           <a:prstGeom prst="rect">
             <a:avLst/>
           </a:prstGeom>
           <a:solidFill>
-            <a:schemeClr val="accent5">
+            <a:schemeClr val="accent4">
               <a:lumMod val="20000"/>
               <a:lumOff val="80000"/>
             </a:schemeClr>
@@ -3141,7 +3194,7 @@
                   <a:schemeClr val="tx1"/>
                 </a:solidFill>
               </a:rPr>
-              <a:t>信源信道</a:t>
+              <a:t>切换</a:t>
             </a:r>
             <a:r>
               <a:rPr lang="zh-CN" altLang="en-US">
@@ -3149,7 +3202,7 @@
                   <a:schemeClr val="tx1"/>
                 </a:solidFill>
               </a:rPr>
-              <a:t>联合编码器</a:t>
+              <a:t>控制器</a:t>
             </a:r>
             <a:endParaRPr lang="zh-CN" altLang="en-US">
               <a:solidFill>
@@ -3161,24 +3214,19 @@
       </p:sp>
       <p:sp>
         <p:nvSpPr>
-          <p:cNvPr id="22" name="矩形 21"/>
+          <p:cNvPr id="23" name="矩形 22"/>
           <p:cNvSpPr/>
           <p:nvPr/>
         </p:nvSpPr>
         <p:spPr>
           <a:xfrm>
-            <a:off x="1758950" y="5567045"/>
+            <a:off x="3530600" y="486410"/>
             <a:ext cx="1636395" cy="706755"/>
           </a:xfrm>
           <a:prstGeom prst="rect">
             <a:avLst/>
           </a:prstGeom>
-          <a:solidFill>
-            <a:schemeClr val="accent4">
-              <a:lumMod val="20000"/>
-              <a:lumOff val="80000"/>
-            </a:schemeClr>
-          </a:solidFill>
+          <a:noFill/>
           <a:ln w="22225">
             <a:solidFill>
               <a:schemeClr val="tx1"/>
@@ -3211,7 +3259,7 @@
                   <a:schemeClr val="tx1"/>
                 </a:solidFill>
               </a:rPr>
-              <a:t>切换</a:t>
+              <a:t>接入与移动性管理</a:t>
             </a:r>
             <a:r>
               <a:rPr lang="zh-CN" altLang="en-US">
@@ -3219,7 +3267,7 @@
                   <a:schemeClr val="tx1"/>
                 </a:solidFill>
               </a:rPr>
-              <a:t>控制器</a:t>
+              <a:t>功能</a:t>
             </a:r>
             <a:endParaRPr lang="zh-CN" altLang="en-US">
               <a:solidFill>
@@ -3231,23 +3279,24 @@
       </p:sp>
       <p:sp>
         <p:nvSpPr>
-          <p:cNvPr id="23" name="矩形 22"/>
+          <p:cNvPr id="24" name="矩形 23"/>
           <p:cNvSpPr/>
           <p:nvPr/>
         </p:nvSpPr>
         <p:spPr>
           <a:xfrm>
-            <a:off x="3530600" y="486410"/>
-            <a:ext cx="1636395" cy="706755"/>
+            <a:off x="3143250" y="99060"/>
+            <a:ext cx="6553835" cy="1376045"/>
           </a:xfrm>
           <a:prstGeom prst="rect">
             <a:avLst/>
           </a:prstGeom>
           <a:noFill/>
-          <a:ln w="22225">
+          <a:ln w="19050">
             <a:solidFill>
               <a:schemeClr val="tx1"/>
             </a:solidFill>
+            <a:prstDash val="sysDash"/>
           </a:ln>
         </p:spPr>
         <p:style>
@@ -3270,51 +3319,58 @@
           <a:bodyPr rtlCol="0" anchor="ctr"/>
           <a:p>
             <a:pPr algn="ctr"/>
-            <a:r>
-              <a:rPr lang="zh-CN" altLang="en-US">
-                <a:solidFill>
-                  <a:schemeClr val="tx1"/>
-                </a:solidFill>
-              </a:rPr>
-              <a:t>接入与移动性管理</a:t>
-            </a:r>
-            <a:r>
-              <a:rPr lang="zh-CN" altLang="en-US">
-                <a:solidFill>
-                  <a:schemeClr val="tx1"/>
-                </a:solidFill>
-              </a:rPr>
-              <a:t>功能</a:t>
-            </a:r>
-            <a:endParaRPr lang="zh-CN" altLang="en-US">
-              <a:solidFill>
-                <a:schemeClr val="tx1"/>
-              </a:solidFill>
-            </a:endParaRPr>
-          </a:p>
-        </p:txBody>
-      </p:sp>
-      <p:sp>
-        <p:nvSpPr>
-          <p:cNvPr id="24" name="矩形 23"/>
-          <p:cNvSpPr/>
+            <a:endParaRPr lang="zh-CN" altLang="en-US"/>
+          </a:p>
+        </p:txBody>
+      </p:sp>
+      <p:sp>
+        <p:nvSpPr>
+          <p:cNvPr id="25" name="文本框 24"/>
+          <p:cNvSpPr txBox="1"/>
           <p:nvPr/>
         </p:nvSpPr>
         <p:spPr>
           <a:xfrm>
-            <a:off x="3143250" y="99060"/>
-            <a:ext cx="6553835" cy="1376045"/>
+            <a:off x="3194050" y="79375"/>
+            <a:ext cx="948690" cy="368300"/>
           </a:xfrm>
           <a:prstGeom prst="rect">
             <a:avLst/>
           </a:prstGeom>
           <a:noFill/>
-          <a:ln w="19050">
-            <a:solidFill>
-              <a:schemeClr val="tx1"/>
-            </a:solidFill>
-            <a:prstDash val="sysDash"/>
-          </a:ln>
+        </p:spPr>
+        <p:txBody>
+          <a:bodyPr wrap="square" rtlCol="0">
+            <a:spAutoFit/>
+          </a:bodyPr>
+          <a:p>
+            <a:r>
+              <a:rPr lang="zh-CN" altLang="en-US" b="1"/>
+              <a:t>核心网</a:t>
+            </a:r>
+            <a:endParaRPr lang="zh-CN" altLang="en-US" b="1"/>
+          </a:p>
+        </p:txBody>
+      </p:sp>
+      <p:sp>
+        <p:nvSpPr>
+          <p:cNvPr id="28" name="右箭头 27"/>
+          <p:cNvSpPr/>
+          <p:nvPr/>
+        </p:nvSpPr>
+        <p:spPr>
+          <a:xfrm>
+            <a:off x="10812780" y="5730875"/>
+            <a:ext cx="652780" cy="583565"/>
+          </a:xfrm>
+          <a:prstGeom prst="rightArrow">
+            <a:avLst/>
+          </a:prstGeom>
+          <a:solidFill>
+            <a:schemeClr val="accent1">
+              <a:alpha val="64000"/>
+            </a:schemeClr>
+          </a:solidFill>
         </p:spPr>
         <p:style>
           <a:lnRef idx="2">
@@ -3340,125 +3396,6 @@
           </a:p>
         </p:txBody>
       </p:sp>
-      <p:sp>
-        <p:nvSpPr>
-          <p:cNvPr id="25" name="文本框 24"/>
-          <p:cNvSpPr txBox="1"/>
-          <p:nvPr/>
-        </p:nvSpPr>
-        <p:spPr>
-          <a:xfrm>
-            <a:off x="3194050" y="79375"/>
-            <a:ext cx="948690" cy="368300"/>
-          </a:xfrm>
-          <a:prstGeom prst="rect">
-            <a:avLst/>
-          </a:prstGeom>
-          <a:noFill/>
-        </p:spPr>
-        <p:txBody>
-          <a:bodyPr wrap="square" rtlCol="0">
-            <a:spAutoFit/>
-          </a:bodyPr>
-          <a:p>
-            <a:r>
-              <a:rPr lang="zh-CN" altLang="en-US" b="1"/>
-              <a:t>核心网</a:t>
-            </a:r>
-            <a:endParaRPr lang="zh-CN" altLang="en-US" b="1"/>
-          </a:p>
-        </p:txBody>
-      </p:sp>
-      <p:sp>
-        <p:nvSpPr>
-          <p:cNvPr id="27" name="矩形 26"/>
-          <p:cNvSpPr/>
-          <p:nvPr/>
-        </p:nvSpPr>
-        <p:spPr>
-          <a:xfrm>
-            <a:off x="1528445" y="4458335"/>
-            <a:ext cx="2001520" cy="2250440"/>
-          </a:xfrm>
-          <a:prstGeom prst="rect">
-            <a:avLst/>
-          </a:prstGeom>
-          <a:noFill/>
-          <a:ln w="19050">
-            <a:solidFill>
-              <a:schemeClr val="tx1"/>
-            </a:solidFill>
-            <a:prstDash val="dash"/>
-          </a:ln>
-        </p:spPr>
-        <p:style>
-          <a:lnRef idx="2">
-            <a:schemeClr val="accent1">
-              <a:lumMod val="75000"/>
-            </a:schemeClr>
-          </a:lnRef>
-          <a:fillRef idx="1">
-            <a:schemeClr val="accent1"/>
-          </a:fillRef>
-          <a:effectRef idx="0">
-            <a:srgbClr val="FFFFFF"/>
-          </a:effectRef>
-          <a:fontRef idx="minor">
-            <a:schemeClr val="lt1"/>
-          </a:fontRef>
-        </p:style>
-        <p:txBody>
-          <a:bodyPr rtlCol="0" anchor="ctr"/>
-          <a:p>
-            <a:pPr algn="ctr"/>
-            <a:endParaRPr lang="zh-CN" altLang="en-US"/>
-          </a:p>
-        </p:txBody>
-      </p:sp>
-      <p:sp>
-        <p:nvSpPr>
-          <p:cNvPr id="28" name="右箭头 27"/>
-          <p:cNvSpPr/>
-          <p:nvPr/>
-        </p:nvSpPr>
-        <p:spPr>
-          <a:xfrm>
-            <a:off x="792480" y="4625340"/>
-            <a:ext cx="923290" cy="583565"/>
-          </a:xfrm>
-          <a:prstGeom prst="rightArrow">
-            <a:avLst/>
-          </a:prstGeom>
-          <a:solidFill>
-            <a:schemeClr val="accent1">
-              <a:alpha val="64000"/>
-            </a:schemeClr>
-          </a:solidFill>
-        </p:spPr>
-        <p:style>
-          <a:lnRef idx="2">
-            <a:schemeClr val="accent1">
-              <a:lumMod val="75000"/>
-            </a:schemeClr>
-          </a:lnRef>
-          <a:fillRef idx="1">
-            <a:schemeClr val="accent1"/>
-          </a:fillRef>
-          <a:effectRef idx="0">
-            <a:srgbClr val="FFFFFF"/>
-          </a:effectRef>
-          <a:fontRef idx="minor">
-            <a:schemeClr val="lt1"/>
-          </a:fontRef>
-        </p:style>
-        <p:txBody>
-          <a:bodyPr rtlCol="0" anchor="ctr"/>
-          <a:p>
-            <a:pPr algn="ctr"/>
-            <a:endParaRPr lang="zh-CN" altLang="en-US"/>
-          </a:p>
-        </p:txBody>
-      </p:sp>
       <p:grpSp>
         <p:nvGrpSpPr>
           <p:cNvPr id="46" name="组合 45"/>
@@ -3467,7 +3404,7 @@
         </p:nvGrpSpPr>
         <p:grpSpPr>
           <a:xfrm>
-            <a:off x="100965" y="4357370"/>
+            <a:off x="126365" y="5387975"/>
             <a:ext cx="923925" cy="1209675"/>
             <a:chOff x="102" y="5898"/>
             <a:chExt cx="1455" cy="1905"/>
@@ -3580,7 +3517,7 @@
         </p:nvSpPr>
         <p:spPr>
           <a:xfrm>
-            <a:off x="1839595" y="6376670"/>
+            <a:off x="1984375" y="6314440"/>
             <a:ext cx="1491615" cy="368300"/>
           </a:xfrm>
           <a:prstGeom prst="rect">
@@ -3604,24 +3541,24 @@
       </p:sp>
       <p:sp>
         <p:nvSpPr>
-          <p:cNvPr id="33" name="圆柱形 32"/>
+          <p:cNvPr id="34" name="矩形 33"/>
           <p:cNvSpPr/>
           <p:nvPr/>
         </p:nvSpPr>
         <p:spPr>
-          <a:xfrm rot="16200000">
-            <a:off x="6161405" y="3606165"/>
-            <a:ext cx="915670" cy="2739390"/>
-          </a:xfrm>
-          <a:prstGeom prst="can">
+          <a:xfrm>
+            <a:off x="5612130" y="486410"/>
+            <a:ext cx="1636395" cy="706755"/>
+          </a:xfrm>
+          <a:prstGeom prst="rect">
             <a:avLst/>
           </a:prstGeom>
-          <a:solidFill>
-            <a:schemeClr val="accent5">
-              <a:lumMod val="20000"/>
-              <a:lumOff val="80000"/>
-            </a:schemeClr>
-          </a:solidFill>
+          <a:noFill/>
+          <a:ln w="22225">
+            <a:solidFill>
+              <a:schemeClr val="tx1"/>
+            </a:solidFill>
+          </a:ln>
         </p:spPr>
         <p:style>
           <a:lnRef idx="2">
@@ -3643,25 +3580,110 @@
           <a:bodyPr rtlCol="0" anchor="ctr"/>
           <a:p>
             <a:pPr algn="ctr"/>
-            <a:endParaRPr lang="zh-CN" altLang="en-US"/>
-          </a:p>
-        </p:txBody>
-      </p:sp>
-      <p:sp>
-        <p:nvSpPr>
-          <p:cNvPr id="34" name="矩形 33"/>
-          <p:cNvSpPr/>
+            <a:r>
+              <a:rPr lang="zh-CN" altLang="en-US">
+                <a:solidFill>
+                  <a:schemeClr val="tx1"/>
+                </a:solidFill>
+              </a:rPr>
+              <a:t>拓扑</a:t>
+            </a:r>
+            <a:r>
+              <a:rPr lang="en-US" altLang="zh-CN">
+                <a:solidFill>
+                  <a:schemeClr val="tx1"/>
+                </a:solidFill>
+              </a:rPr>
+              <a:t>/</a:t>
+            </a:r>
+            <a:r>
+              <a:rPr lang="zh-CN" altLang="en-US">
+                <a:solidFill>
+                  <a:schemeClr val="tx1"/>
+                </a:solidFill>
+              </a:rPr>
+              <a:t>星历</a:t>
+            </a:r>
+            <a:endParaRPr lang="zh-CN" altLang="en-US">
+              <a:solidFill>
+                <a:schemeClr val="tx1"/>
+              </a:solidFill>
+            </a:endParaRPr>
+          </a:p>
+          <a:p>
+            <a:pPr algn="ctr"/>
+            <a:r>
+              <a:rPr lang="zh-CN" altLang="en-US">
+                <a:solidFill>
+                  <a:schemeClr val="tx1"/>
+                </a:solidFill>
+              </a:rPr>
+              <a:t>管理</a:t>
+            </a:r>
+            <a:endParaRPr lang="zh-CN" altLang="en-US">
+              <a:solidFill>
+                <a:schemeClr val="tx1"/>
+              </a:solidFill>
+            </a:endParaRPr>
+          </a:p>
+        </p:txBody>
+      </p:sp>
+      <p:sp>
+        <p:nvSpPr>
+          <p:cNvPr id="40" name="文本框 39"/>
+          <p:cNvSpPr txBox="1"/>
           <p:nvPr/>
         </p:nvSpPr>
         <p:spPr>
           <a:xfrm>
-            <a:off x="5612130" y="486410"/>
-            <a:ext cx="1636395" cy="706755"/>
+            <a:off x="11465560" y="5669280"/>
+            <a:ext cx="819785" cy="645160"/>
           </a:xfrm>
           <a:prstGeom prst="rect">
             <a:avLst/>
           </a:prstGeom>
           <a:noFill/>
+        </p:spPr>
+        <p:txBody>
+          <a:bodyPr wrap="square" rtlCol="0">
+            <a:spAutoFit/>
+          </a:bodyPr>
+          <a:p>
+            <a:r>
+              <a:rPr lang="zh-CN" altLang="en-US" b="1"/>
+              <a:t>下游</a:t>
+            </a:r>
+            <a:endParaRPr lang="zh-CN" altLang="en-US" b="1"/>
+          </a:p>
+          <a:p>
+            <a:r>
+              <a:rPr lang="zh-CN" altLang="en-US" b="1"/>
+              <a:t>任务</a:t>
+            </a:r>
+            <a:endParaRPr lang="zh-CN" altLang="en-US" b="1"/>
+          </a:p>
+        </p:txBody>
+      </p:sp>
+      <p:sp>
+        <p:nvSpPr>
+          <p:cNvPr id="42" name="矩形 41"/>
+          <p:cNvSpPr/>
+          <p:nvPr/>
+        </p:nvSpPr>
+        <p:spPr>
+          <a:xfrm>
+            <a:off x="1758950" y="4149725"/>
+            <a:ext cx="1636395" cy="706755"/>
+          </a:xfrm>
+          <a:prstGeom prst="rect">
+            <a:avLst/>
+          </a:prstGeom>
+          <a:solidFill>
+            <a:schemeClr val="accent6">
+              <a:lumMod val="20000"/>
+              <a:lumOff val="80000"/>
+            </a:schemeClr>
+          </a:solidFill>
           <a:ln w="22225">
             <a:solidFill>
               <a:schemeClr val="tx1"/>
@@ -3689,28 +3711,20 @@
           <a:p>
             <a:pPr algn="ctr"/>
             <a:r>
+              <a:rPr lang="en-US" altLang="zh-CN">
+                <a:solidFill>
+                  <a:schemeClr val="tx1"/>
+                </a:solidFill>
+              </a:rPr>
+              <a:t>MAC</a:t>
+            </a:r>
+            <a:r>
               <a:rPr lang="zh-CN" altLang="en-US">
                 <a:solidFill>
                   <a:schemeClr val="tx1"/>
                 </a:solidFill>
               </a:rPr>
-              <a:t>拓扑</a:t>
-            </a:r>
-            <a:r>
-              <a:rPr lang="en-US" altLang="zh-CN">
-                <a:solidFill>
-                  <a:schemeClr val="tx1"/>
-                </a:solidFill>
-              </a:rPr>
-              <a:t>/</a:t>
-            </a:r>
-            <a:r>
-              <a:rPr lang="zh-CN" altLang="en-US">
-                <a:solidFill>
-                  <a:schemeClr val="tx1"/>
-                </a:solidFill>
-              </a:rPr>
-              <a:t>星历</a:t>
+              <a:t>调度器</a:t>
             </a:r>
             <a:endParaRPr lang="zh-CN" altLang="en-US">
               <a:solidFill>
@@ -3718,43 +3732,66 @@
               </a:solidFill>
             </a:endParaRPr>
           </a:p>
-          <a:p>
-            <a:pPr algn="ctr"/>
-            <a:r>
-              <a:rPr lang="zh-CN" altLang="en-US">
-                <a:solidFill>
-                  <a:schemeClr val="tx1"/>
-                </a:solidFill>
-              </a:rPr>
-              <a:t>管理</a:t>
-            </a:r>
-            <a:endParaRPr lang="zh-CN" altLang="en-US">
-              <a:solidFill>
-                <a:schemeClr val="tx1"/>
-              </a:solidFill>
-            </a:endParaRPr>
-          </a:p>
-        </p:txBody>
-      </p:sp>
-      <p:sp>
-        <p:nvSpPr>
-          <p:cNvPr id="39" name="右箭头 38"/>
+        </p:txBody>
+      </p:sp>
+      <p:sp>
+        <p:nvSpPr>
+          <p:cNvPr id="44" name="文本框 43"/>
+          <p:cNvSpPr txBox="1"/>
+          <p:nvPr/>
+        </p:nvSpPr>
+        <p:spPr>
+          <a:xfrm>
+            <a:off x="1528445" y="2957195"/>
+            <a:ext cx="1179830" cy="368300"/>
+          </a:xfrm>
+          <a:prstGeom prst="rect">
+            <a:avLst/>
+          </a:prstGeom>
+          <a:noFill/>
+        </p:spPr>
+        <p:txBody>
+          <a:bodyPr wrap="square" rtlCol="0">
+            <a:spAutoFit/>
+          </a:bodyPr>
+          <a:p>
+            <a:r>
+              <a:rPr lang="zh-CN" altLang="en-US" b="1"/>
+              <a:t>接入</a:t>
+            </a:r>
+            <a:r>
+              <a:rPr lang="zh-CN" altLang="en-US" b="1"/>
+              <a:t>卫星</a:t>
+            </a:r>
+            <a:endParaRPr lang="zh-CN" altLang="en-US" b="1"/>
+          </a:p>
+        </p:txBody>
+      </p:sp>
+      <p:sp>
+        <p:nvSpPr>
+          <p:cNvPr id="45" name="矩形 44"/>
           <p:cNvSpPr/>
           <p:nvPr/>
         </p:nvSpPr>
         <p:spPr>
           <a:xfrm>
-            <a:off x="10665460" y="4625340"/>
-            <a:ext cx="923290" cy="583565"/>
-          </a:xfrm>
-          <a:prstGeom prst="rightArrow">
+            <a:off x="1758950" y="3336290"/>
+            <a:ext cx="1636395" cy="706755"/>
+          </a:xfrm>
+          <a:prstGeom prst="rect">
             <a:avLst/>
           </a:prstGeom>
           <a:solidFill>
-            <a:schemeClr val="accent1">
-              <a:alpha val="64000"/>
+            <a:schemeClr val="accent6">
+              <a:lumMod val="20000"/>
+              <a:lumOff val="80000"/>
             </a:schemeClr>
           </a:solidFill>
+          <a:ln w="22225">
+            <a:solidFill>
+              <a:schemeClr val="tx1"/>
+            </a:solidFill>
+          </a:ln>
         </p:spPr>
         <p:style>
           <a:lnRef idx="2">
@@ -3776,93 +3813,39 @@
           <a:bodyPr rtlCol="0" anchor="ctr"/>
           <a:p>
             <a:pPr algn="ctr"/>
-            <a:endParaRPr lang="zh-CN" altLang="en-US"/>
-          </a:p>
-        </p:txBody>
-      </p:sp>
-      <p:sp>
-        <p:nvSpPr>
-          <p:cNvPr id="40" name="文本框 39"/>
-          <p:cNvSpPr txBox="1"/>
-          <p:nvPr/>
-        </p:nvSpPr>
-        <p:spPr>
-          <a:xfrm>
-            <a:off x="11532870" y="4641215"/>
-            <a:ext cx="819785" cy="645160"/>
-          </a:xfrm>
-          <a:prstGeom prst="rect">
-            <a:avLst/>
-          </a:prstGeom>
-          <a:noFill/>
-        </p:spPr>
-        <p:txBody>
-          <a:bodyPr wrap="square" rtlCol="0">
-            <a:spAutoFit/>
-          </a:bodyPr>
-          <a:p>
-            <a:r>
-              <a:rPr lang="zh-CN" altLang="en-US"/>
-              <a:t>下游</a:t>
-            </a:r>
-            <a:endParaRPr lang="zh-CN" altLang="en-US"/>
-          </a:p>
-          <a:p>
-            <a:r>
-              <a:rPr lang="zh-CN" altLang="en-US"/>
-              <a:t>任务</a:t>
-            </a:r>
-            <a:endParaRPr lang="zh-CN" altLang="en-US"/>
-          </a:p>
-        </p:txBody>
-      </p:sp>
-      <p:sp>
-        <p:nvSpPr>
-          <p:cNvPr id="41" name="文本框 40"/>
-          <p:cNvSpPr txBox="1"/>
-          <p:nvPr/>
-        </p:nvSpPr>
-        <p:spPr>
-          <a:xfrm>
-            <a:off x="5462270" y="4725670"/>
-            <a:ext cx="2526665" cy="368300"/>
-          </a:xfrm>
-          <a:prstGeom prst="rect">
-            <a:avLst/>
-          </a:prstGeom>
-          <a:noFill/>
-        </p:spPr>
-        <p:txBody>
-          <a:bodyPr wrap="square" rtlCol="0">
-            <a:spAutoFit/>
-          </a:bodyPr>
-          <a:p>
-            <a:pPr algn="ctr"/>
-            <a:r>
-              <a:rPr lang="zh-CN" altLang="en-US"/>
-              <a:t>星间</a:t>
-            </a:r>
-            <a:r>
-              <a:rPr lang="en-US" altLang="zh-CN"/>
-              <a:t>/</a:t>
-            </a:r>
-            <a:r>
-              <a:rPr lang="zh-CN" altLang="en-US"/>
-              <a:t>星地多跳传输</a:t>
-            </a:r>
-            <a:endParaRPr lang="zh-CN" altLang="en-US"/>
-          </a:p>
-        </p:txBody>
-      </p:sp>
-      <p:sp>
-        <p:nvSpPr>
-          <p:cNvPr id="42" name="矩形 41"/>
+            <a:r>
+              <a:rPr lang="zh-CN" altLang="en-US">
+                <a:solidFill>
+                  <a:schemeClr val="tx1"/>
+                </a:solidFill>
+              </a:rPr>
+              <a:t>切片</a:t>
+            </a:r>
+            <a:r>
+              <a:rPr lang="zh-CN" altLang="en-US">
+                <a:solidFill>
+                  <a:schemeClr val="tx1"/>
+                </a:solidFill>
+              </a:rPr>
+              <a:t>调度器</a:t>
+            </a:r>
+            <a:endParaRPr lang="zh-CN" altLang="en-US">
+              <a:solidFill>
+                <a:schemeClr val="tx1"/>
+              </a:solidFill>
+            </a:endParaRPr>
+          </a:p>
+        </p:txBody>
+      </p:sp>
+      <p:sp>
+        <p:nvSpPr>
+          <p:cNvPr id="49" name="矩形 48"/>
           <p:cNvSpPr/>
           <p:nvPr/>
         </p:nvSpPr>
         <p:spPr>
           <a:xfrm>
-            <a:off x="1758950" y="2943225"/>
+            <a:off x="8936990" y="4138930"/>
             <a:ext cx="1636395" cy="706755"/>
           </a:xfrm>
           <a:prstGeom prst="rect">
@@ -3926,24 +3909,61 @@
       </p:sp>
       <p:sp>
         <p:nvSpPr>
-          <p:cNvPr id="43" name="矩形 42"/>
-          <p:cNvSpPr/>
+          <p:cNvPr id="51" name="文本框 50"/>
+          <p:cNvSpPr txBox="1"/>
           <p:nvPr/>
         </p:nvSpPr>
         <p:spPr>
           <a:xfrm>
-            <a:off x="1484630" y="1682750"/>
-            <a:ext cx="2221230" cy="2031365"/>
+            <a:off x="8700135" y="2818765"/>
+            <a:ext cx="1821815" cy="368300"/>
           </a:xfrm>
           <a:prstGeom prst="rect">
             <a:avLst/>
           </a:prstGeom>
           <a:noFill/>
-          <a:ln w="19050">
+        </p:spPr>
+        <p:txBody>
+          <a:bodyPr wrap="square" rtlCol="0">
+            <a:spAutoFit/>
+          </a:bodyPr>
+          <a:p>
+            <a:r>
+              <a:rPr lang="zh-CN" altLang="en-US" b="1"/>
+              <a:t>地面站</a:t>
+            </a:r>
+            <a:r>
+              <a:rPr lang="zh-CN" altLang="en-US" b="1"/>
+              <a:t>过顶卫星</a:t>
+            </a:r>
+            <a:endParaRPr lang="zh-CN" altLang="en-US" b="1"/>
+          </a:p>
+        </p:txBody>
+      </p:sp>
+      <p:sp>
+        <p:nvSpPr>
+          <p:cNvPr id="52" name="矩形 51"/>
+          <p:cNvSpPr/>
+          <p:nvPr/>
+        </p:nvSpPr>
+        <p:spPr>
+          <a:xfrm>
+            <a:off x="8936990" y="3325495"/>
+            <a:ext cx="1636395" cy="706755"/>
+          </a:xfrm>
+          <a:prstGeom prst="rect">
+            <a:avLst/>
+          </a:prstGeom>
+          <a:solidFill>
+            <a:schemeClr val="accent6">
+              <a:lumMod val="20000"/>
+              <a:lumOff val="80000"/>
+            </a:schemeClr>
+          </a:solidFill>
+          <a:ln w="22225">
             <a:solidFill>
               <a:schemeClr val="tx1"/>
             </a:solidFill>
-            <a:prstDash val="dash"/>
           </a:ln>
         </p:spPr>
         <p:style>
@@ -3966,61 +3986,48 @@
           <a:bodyPr rtlCol="0" anchor="ctr"/>
           <a:p>
             <a:pPr algn="ctr"/>
-            <a:endParaRPr lang="zh-CN" altLang="en-US"/>
-          </a:p>
-        </p:txBody>
-      </p:sp>
-      <p:sp>
-        <p:nvSpPr>
-          <p:cNvPr id="44" name="文本框 43"/>
-          <p:cNvSpPr txBox="1"/>
-          <p:nvPr/>
-        </p:nvSpPr>
-        <p:spPr>
-          <a:xfrm>
-            <a:off x="1528445" y="1682750"/>
-            <a:ext cx="1179830" cy="368300"/>
-          </a:xfrm>
-          <a:prstGeom prst="rect">
-            <a:avLst/>
-          </a:prstGeom>
-          <a:noFill/>
-        </p:spPr>
-        <p:txBody>
-          <a:bodyPr wrap="square" rtlCol="0">
-            <a:spAutoFit/>
-          </a:bodyPr>
-          <a:p>
-            <a:r>
-              <a:rPr lang="zh-CN" altLang="en-US" b="1"/>
-              <a:t>接入</a:t>
-            </a:r>
-            <a:r>
-              <a:rPr lang="zh-CN" altLang="en-US" b="1"/>
-              <a:t>卫星</a:t>
-            </a:r>
-            <a:endParaRPr lang="zh-CN" altLang="en-US" b="1"/>
-          </a:p>
-        </p:txBody>
-      </p:sp>
-      <p:sp>
-        <p:nvSpPr>
-          <p:cNvPr id="45" name="矩形 44"/>
+            <a:r>
+              <a:rPr lang="zh-CN" altLang="en-US">
+                <a:solidFill>
+                  <a:schemeClr val="tx1"/>
+                </a:solidFill>
+              </a:rPr>
+              <a:t>切片</a:t>
+            </a:r>
+            <a:r>
+              <a:rPr lang="zh-CN" altLang="en-US">
+                <a:solidFill>
+                  <a:schemeClr val="tx1"/>
+                </a:solidFill>
+              </a:rPr>
+              <a:t>调度器</a:t>
+            </a:r>
+            <a:endParaRPr lang="zh-CN" altLang="en-US">
+              <a:solidFill>
+                <a:schemeClr val="tx1"/>
+              </a:solidFill>
+            </a:endParaRPr>
+          </a:p>
+        </p:txBody>
+      </p:sp>
+      <p:sp>
+        <p:nvSpPr>
+          <p:cNvPr id="2" name="矩形 1"/>
           <p:cNvSpPr/>
           <p:nvPr/>
         </p:nvSpPr>
         <p:spPr>
           <a:xfrm>
-            <a:off x="1758950" y="2129790"/>
+            <a:off x="8662670" y="1718310"/>
             <a:ext cx="1636395" cy="706755"/>
           </a:xfrm>
           <a:prstGeom prst="rect">
             <a:avLst/>
           </a:prstGeom>
           <a:solidFill>
-            <a:schemeClr val="accent6">
-              <a:lumMod val="20000"/>
-              <a:lumOff val="80000"/>
+            <a:schemeClr val="accent5">
+              <a:lumMod val="40000"/>
+              <a:lumOff val="60000"/>
             </a:schemeClr>
           </a:solidFill>
           <a:ln w="22225">
@@ -4054,44 +4061,48 @@
                 <a:solidFill>
                   <a:schemeClr val="tx1"/>
                 </a:solidFill>
+                <a:sym typeface="+mn-ea"/>
               </a:rPr>
-              <a:t>切片</a:t>
+              <a:t>重传判决与</a:t>
             </a:r>
             <a:r>
               <a:rPr lang="zh-CN" altLang="en-US">
                 <a:solidFill>
                   <a:schemeClr val="tx1"/>
                 </a:solidFill>
+                <a:sym typeface="+mn-ea"/>
               </a:rPr>
-              <a:t>调度器</a:t>
+              <a:t>解码</a:t>
             </a:r>
             <a:endParaRPr lang="zh-CN" altLang="en-US">
               <a:solidFill>
                 <a:schemeClr val="tx1"/>
               </a:solidFill>
+              <a:sym typeface="+mn-ea"/>
             </a:endParaRPr>
           </a:p>
         </p:txBody>
       </p:sp>
       <p:sp>
         <p:nvSpPr>
-          <p:cNvPr id="47" name="右箭头 46"/>
+          <p:cNvPr id="3" name="矩形 2"/>
           <p:cNvSpPr/>
           <p:nvPr/>
         </p:nvSpPr>
         <p:spPr>
-          <a:xfrm rot="16200000">
-            <a:off x="2258060" y="3959225"/>
-            <a:ext cx="534035" cy="583565"/>
-          </a:xfrm>
-          <a:prstGeom prst="rightArrow">
+          <a:xfrm>
+            <a:off x="8936990" y="5567045"/>
+            <a:ext cx="1636395" cy="706755"/>
+          </a:xfrm>
+          <a:prstGeom prst="rect">
             <a:avLst/>
           </a:prstGeom>
-          <a:solidFill>
-            <a:schemeClr val="accent1">
-              <a:alpha val="64000"/>
-            </a:schemeClr>
-          </a:solidFill>
+          <a:noFill/>
+          <a:ln w="22225">
+            <a:solidFill>
+              <a:schemeClr val="tx1"/>
+            </a:solidFill>
+          </a:ln>
         </p:spPr>
         <p:style>
           <a:lnRef idx="2">
@@ -4113,30 +4124,67 @@
           <a:bodyPr rtlCol="0" anchor="ctr"/>
           <a:p>
             <a:pPr algn="ctr"/>
-            <a:endParaRPr lang="zh-CN" altLang="en-US"/>
-          </a:p>
-        </p:txBody>
-      </p:sp>
-      <p:sp>
-        <p:nvSpPr>
-          <p:cNvPr id="49" name="矩形 48"/>
-          <p:cNvSpPr/>
+            <a:r>
+              <a:rPr lang="zh-CN" altLang="en-US">
+                <a:solidFill>
+                  <a:schemeClr val="tx1"/>
+                </a:solidFill>
+              </a:rPr>
+              <a:t>地面站</a:t>
+            </a:r>
+            <a:endParaRPr lang="zh-CN" altLang="en-US">
+              <a:solidFill>
+                <a:schemeClr val="tx1"/>
+              </a:solidFill>
+            </a:endParaRPr>
+          </a:p>
+        </p:txBody>
+      </p:sp>
+      <p:sp>
+        <p:nvSpPr>
+          <p:cNvPr id="5" name="文本框 4"/>
+          <p:cNvSpPr txBox="1"/>
           <p:nvPr/>
         </p:nvSpPr>
         <p:spPr>
           <a:xfrm>
-            <a:off x="8973820" y="2918460"/>
-            <a:ext cx="1636395" cy="706755"/>
+            <a:off x="8986520" y="6273800"/>
+            <a:ext cx="1712595" cy="368300"/>
           </a:xfrm>
           <a:prstGeom prst="rect">
             <a:avLst/>
           </a:prstGeom>
-          <a:solidFill>
-            <a:schemeClr val="accent6">
-              <a:lumMod val="20000"/>
-              <a:lumOff val="80000"/>
-            </a:schemeClr>
-          </a:solidFill>
+          <a:noFill/>
+        </p:spPr>
+        <p:txBody>
+          <a:bodyPr wrap="square" rtlCol="0">
+            <a:spAutoFit/>
+          </a:bodyPr>
+          <a:p>
+            <a:pPr algn="ctr"/>
+            <a:r>
+              <a:rPr lang="zh-CN" altLang="en-US" b="1"/>
+              <a:t>接收端</a:t>
+            </a:r>
+            <a:endParaRPr lang="zh-CN" altLang="en-US" b="1"/>
+          </a:p>
+        </p:txBody>
+      </p:sp>
+      <p:sp>
+        <p:nvSpPr>
+          <p:cNvPr id="6" name="矩形 5"/>
+          <p:cNvSpPr/>
+          <p:nvPr/>
+        </p:nvSpPr>
+        <p:spPr>
+          <a:xfrm>
+            <a:off x="7693660" y="486410"/>
+            <a:ext cx="1636395" cy="706755"/>
+          </a:xfrm>
+          <a:prstGeom prst="rect">
+            <a:avLst/>
+          </a:prstGeom>
+          <a:noFill/>
           <a:ln w="22225">
             <a:solidFill>
               <a:schemeClr val="tx1"/>
@@ -4164,482 +4212,6 @@
           <a:p>
             <a:pPr algn="ctr"/>
             <a:r>
-              <a:rPr lang="en-US" altLang="zh-CN">
-                <a:solidFill>
-                  <a:schemeClr val="tx1"/>
-                </a:solidFill>
-              </a:rPr>
-              <a:t>MAC</a:t>
-            </a:r>
-            <a:r>
-              <a:rPr lang="zh-CN" altLang="en-US">
-                <a:solidFill>
-                  <a:schemeClr val="tx1"/>
-                </a:solidFill>
-              </a:rPr>
-              <a:t>调度器</a:t>
-            </a:r>
-            <a:endParaRPr lang="zh-CN" altLang="en-US">
-              <a:solidFill>
-                <a:schemeClr val="tx1"/>
-              </a:solidFill>
-            </a:endParaRPr>
-          </a:p>
-        </p:txBody>
-      </p:sp>
-      <p:sp>
-        <p:nvSpPr>
-          <p:cNvPr id="50" name="矩形 49"/>
-          <p:cNvSpPr/>
-          <p:nvPr/>
-        </p:nvSpPr>
-        <p:spPr>
-          <a:xfrm>
-            <a:off x="8699500" y="1657985"/>
-            <a:ext cx="2221230" cy="2031365"/>
-          </a:xfrm>
-          <a:prstGeom prst="rect">
-            <a:avLst/>
-          </a:prstGeom>
-          <a:noFill/>
-          <a:ln w="19050">
-            <a:solidFill>
-              <a:schemeClr val="tx1"/>
-            </a:solidFill>
-            <a:prstDash val="dash"/>
-          </a:ln>
-        </p:spPr>
-        <p:style>
-          <a:lnRef idx="2">
-            <a:schemeClr val="accent1">
-              <a:lumMod val="75000"/>
-            </a:schemeClr>
-          </a:lnRef>
-          <a:fillRef idx="1">
-            <a:schemeClr val="accent1"/>
-          </a:fillRef>
-          <a:effectRef idx="0">
-            <a:srgbClr val="FFFFFF"/>
-          </a:effectRef>
-          <a:fontRef idx="minor">
-            <a:schemeClr val="lt1"/>
-          </a:fontRef>
-        </p:style>
-        <p:txBody>
-          <a:bodyPr rtlCol="0" anchor="ctr"/>
-          <a:p>
-            <a:pPr algn="ctr"/>
-            <a:endParaRPr lang="zh-CN" altLang="en-US"/>
-          </a:p>
-        </p:txBody>
-      </p:sp>
-      <p:sp>
-        <p:nvSpPr>
-          <p:cNvPr id="51" name="文本框 50"/>
-          <p:cNvSpPr txBox="1"/>
-          <p:nvPr/>
-        </p:nvSpPr>
-        <p:spPr>
-          <a:xfrm>
-            <a:off x="8743315" y="1657985"/>
-            <a:ext cx="1179830" cy="368300"/>
-          </a:xfrm>
-          <a:prstGeom prst="rect">
-            <a:avLst/>
-          </a:prstGeom>
-          <a:noFill/>
-        </p:spPr>
-        <p:txBody>
-          <a:bodyPr wrap="square" rtlCol="0">
-            <a:spAutoFit/>
-          </a:bodyPr>
-          <a:p>
-            <a:r>
-              <a:rPr lang="zh-CN" altLang="en-US" b="1"/>
-              <a:t>接入</a:t>
-            </a:r>
-            <a:r>
-              <a:rPr lang="zh-CN" altLang="en-US" b="1"/>
-              <a:t>卫星</a:t>
-            </a:r>
-            <a:endParaRPr lang="zh-CN" altLang="en-US" b="1"/>
-          </a:p>
-        </p:txBody>
-      </p:sp>
-      <p:sp>
-        <p:nvSpPr>
-          <p:cNvPr id="52" name="矩形 51"/>
-          <p:cNvSpPr/>
-          <p:nvPr/>
-        </p:nvSpPr>
-        <p:spPr>
-          <a:xfrm>
-            <a:off x="8973820" y="2105025"/>
-            <a:ext cx="1636395" cy="706755"/>
-          </a:xfrm>
-          <a:prstGeom prst="rect">
-            <a:avLst/>
-          </a:prstGeom>
-          <a:solidFill>
-            <a:schemeClr val="accent6">
-              <a:lumMod val="20000"/>
-              <a:lumOff val="80000"/>
-            </a:schemeClr>
-          </a:solidFill>
-          <a:ln w="22225">
-            <a:solidFill>
-              <a:schemeClr val="tx1"/>
-            </a:solidFill>
-          </a:ln>
-        </p:spPr>
-        <p:style>
-          <a:lnRef idx="2">
-            <a:schemeClr val="accent1">
-              <a:lumMod val="75000"/>
-            </a:schemeClr>
-          </a:lnRef>
-          <a:fillRef idx="1">
-            <a:schemeClr val="accent1"/>
-          </a:fillRef>
-          <a:effectRef idx="0">
-            <a:srgbClr val="FFFFFF"/>
-          </a:effectRef>
-          <a:fontRef idx="minor">
-            <a:schemeClr val="lt1"/>
-          </a:fontRef>
-        </p:style>
-        <p:txBody>
-          <a:bodyPr rtlCol="0" anchor="ctr"/>
-          <a:p>
-            <a:pPr algn="ctr"/>
-            <a:r>
-              <a:rPr lang="zh-CN" altLang="en-US">
-                <a:solidFill>
-                  <a:schemeClr val="tx1"/>
-                </a:solidFill>
-              </a:rPr>
-              <a:t>切片</a:t>
-            </a:r>
-            <a:r>
-              <a:rPr lang="zh-CN" altLang="en-US">
-                <a:solidFill>
-                  <a:schemeClr val="tx1"/>
-                </a:solidFill>
-              </a:rPr>
-              <a:t>调度器</a:t>
-            </a:r>
-            <a:endParaRPr lang="zh-CN" altLang="en-US">
-              <a:solidFill>
-                <a:schemeClr val="tx1"/>
-              </a:solidFill>
-            </a:endParaRPr>
-          </a:p>
-        </p:txBody>
-      </p:sp>
-      <p:sp>
-        <p:nvSpPr>
-          <p:cNvPr id="53" name="右箭头 52"/>
-          <p:cNvSpPr/>
-          <p:nvPr/>
-        </p:nvSpPr>
-        <p:spPr>
-          <a:xfrm rot="19380000">
-            <a:off x="7919720" y="3758565"/>
-            <a:ext cx="1035685" cy="583565"/>
-          </a:xfrm>
-          <a:prstGeom prst="rightArrow">
-            <a:avLst/>
-          </a:prstGeom>
-          <a:solidFill>
-            <a:schemeClr val="accent1">
-              <a:alpha val="64000"/>
-            </a:schemeClr>
-          </a:solidFill>
-        </p:spPr>
-        <p:style>
-          <a:lnRef idx="2">
-            <a:schemeClr val="accent1">
-              <a:lumMod val="75000"/>
-            </a:schemeClr>
-          </a:lnRef>
-          <a:fillRef idx="1">
-            <a:schemeClr val="accent1"/>
-          </a:fillRef>
-          <a:effectRef idx="0">
-            <a:srgbClr val="FFFFFF"/>
-          </a:effectRef>
-          <a:fontRef idx="minor">
-            <a:schemeClr val="lt1"/>
-          </a:fontRef>
-        </p:style>
-        <p:txBody>
-          <a:bodyPr rtlCol="0" anchor="ctr"/>
-          <a:p>
-            <a:pPr algn="ctr"/>
-            <a:endParaRPr lang="zh-CN" altLang="en-US"/>
-          </a:p>
-        </p:txBody>
-      </p:sp>
-      <p:sp>
-        <p:nvSpPr>
-          <p:cNvPr id="2" name="矩形 1"/>
-          <p:cNvSpPr/>
-          <p:nvPr/>
-        </p:nvSpPr>
-        <p:spPr>
-          <a:xfrm>
-            <a:off x="8955405" y="4579620"/>
-            <a:ext cx="1636395" cy="706755"/>
-          </a:xfrm>
-          <a:prstGeom prst="rect">
-            <a:avLst/>
-          </a:prstGeom>
-          <a:solidFill>
-            <a:schemeClr val="accent5">
-              <a:lumMod val="20000"/>
-              <a:lumOff val="80000"/>
-            </a:schemeClr>
-          </a:solidFill>
-          <a:ln w="22225">
-            <a:solidFill>
-              <a:schemeClr val="tx1"/>
-            </a:solidFill>
-          </a:ln>
-        </p:spPr>
-        <p:style>
-          <a:lnRef idx="2">
-            <a:schemeClr val="accent1">
-              <a:lumMod val="75000"/>
-            </a:schemeClr>
-          </a:lnRef>
-          <a:fillRef idx="1">
-            <a:schemeClr val="accent1"/>
-          </a:fillRef>
-          <a:effectRef idx="0">
-            <a:srgbClr val="FFFFFF"/>
-          </a:effectRef>
-          <a:fontRef idx="minor">
-            <a:schemeClr val="lt1"/>
-          </a:fontRef>
-        </p:style>
-        <p:txBody>
-          <a:bodyPr rtlCol="0" anchor="ctr"/>
-          <a:p>
-            <a:pPr algn="ctr"/>
-            <a:r>
-              <a:rPr lang="zh-CN" altLang="en-US">
-                <a:solidFill>
-                  <a:schemeClr val="tx1"/>
-                </a:solidFill>
-                <a:sym typeface="+mn-ea"/>
-              </a:rPr>
-              <a:t>信源信道联合</a:t>
-            </a:r>
-            <a:r>
-              <a:rPr lang="zh-CN" altLang="en-US">
-                <a:solidFill>
-                  <a:schemeClr val="tx1"/>
-                </a:solidFill>
-                <a:sym typeface="+mn-ea"/>
-              </a:rPr>
-              <a:t>解码器</a:t>
-            </a:r>
-            <a:endParaRPr lang="zh-CN" altLang="en-US">
-              <a:solidFill>
-                <a:schemeClr val="tx1"/>
-              </a:solidFill>
-            </a:endParaRPr>
-          </a:p>
-        </p:txBody>
-      </p:sp>
-      <p:sp>
-        <p:nvSpPr>
-          <p:cNvPr id="3" name="矩形 2"/>
-          <p:cNvSpPr/>
-          <p:nvPr/>
-        </p:nvSpPr>
-        <p:spPr>
-          <a:xfrm>
-            <a:off x="8955405" y="5567045"/>
-            <a:ext cx="1636395" cy="706755"/>
-          </a:xfrm>
-          <a:prstGeom prst="rect">
-            <a:avLst/>
-          </a:prstGeom>
-          <a:solidFill>
-            <a:schemeClr val="accent4">
-              <a:lumMod val="20000"/>
-              <a:lumOff val="80000"/>
-            </a:schemeClr>
-          </a:solidFill>
-          <a:ln w="22225">
-            <a:solidFill>
-              <a:schemeClr val="tx1"/>
-            </a:solidFill>
-          </a:ln>
-        </p:spPr>
-        <p:style>
-          <a:lnRef idx="2">
-            <a:schemeClr val="accent1">
-              <a:lumMod val="75000"/>
-            </a:schemeClr>
-          </a:lnRef>
-          <a:fillRef idx="1">
-            <a:schemeClr val="accent1"/>
-          </a:fillRef>
-          <a:effectRef idx="0">
-            <a:srgbClr val="FFFFFF"/>
-          </a:effectRef>
-          <a:fontRef idx="minor">
-            <a:schemeClr val="lt1"/>
-          </a:fontRef>
-        </p:style>
-        <p:txBody>
-          <a:bodyPr rtlCol="0" anchor="ctr"/>
-          <a:p>
-            <a:pPr algn="ctr"/>
-            <a:r>
-              <a:rPr lang="zh-CN" altLang="en-US">
-                <a:solidFill>
-                  <a:schemeClr val="tx1"/>
-                </a:solidFill>
-              </a:rPr>
-              <a:t>切换</a:t>
-            </a:r>
-            <a:r>
-              <a:rPr lang="zh-CN" altLang="en-US">
-                <a:solidFill>
-                  <a:schemeClr val="tx1"/>
-                </a:solidFill>
-              </a:rPr>
-              <a:t>控制器</a:t>
-            </a:r>
-            <a:endParaRPr lang="zh-CN" altLang="en-US">
-              <a:solidFill>
-                <a:schemeClr val="tx1"/>
-              </a:solidFill>
-            </a:endParaRPr>
-          </a:p>
-        </p:txBody>
-      </p:sp>
-      <p:sp>
-        <p:nvSpPr>
-          <p:cNvPr id="4" name="矩形 3"/>
-          <p:cNvSpPr/>
-          <p:nvPr/>
-        </p:nvSpPr>
-        <p:spPr>
-          <a:xfrm>
-            <a:off x="8867775" y="4458335"/>
-            <a:ext cx="2047875" cy="2250440"/>
-          </a:xfrm>
-          <a:prstGeom prst="rect">
-            <a:avLst/>
-          </a:prstGeom>
-          <a:noFill/>
-          <a:ln w="19050">
-            <a:solidFill>
-              <a:schemeClr val="tx1"/>
-            </a:solidFill>
-            <a:prstDash val="dash"/>
-          </a:ln>
-        </p:spPr>
-        <p:style>
-          <a:lnRef idx="2">
-            <a:schemeClr val="accent1">
-              <a:lumMod val="75000"/>
-            </a:schemeClr>
-          </a:lnRef>
-          <a:fillRef idx="1">
-            <a:schemeClr val="accent1"/>
-          </a:fillRef>
-          <a:effectRef idx="0">
-            <a:srgbClr val="FFFFFF"/>
-          </a:effectRef>
-          <a:fontRef idx="minor">
-            <a:schemeClr val="lt1"/>
-          </a:fontRef>
-        </p:style>
-        <p:txBody>
-          <a:bodyPr rtlCol="0" anchor="ctr"/>
-          <a:p>
-            <a:pPr algn="ctr"/>
-            <a:endParaRPr lang="zh-CN" altLang="en-US"/>
-          </a:p>
-        </p:txBody>
-      </p:sp>
-      <p:sp>
-        <p:nvSpPr>
-          <p:cNvPr id="5" name="文本框 4"/>
-          <p:cNvSpPr txBox="1"/>
-          <p:nvPr/>
-        </p:nvSpPr>
-        <p:spPr>
-          <a:xfrm>
-            <a:off x="9100185" y="6357620"/>
-            <a:ext cx="1491615" cy="368300"/>
-          </a:xfrm>
-          <a:prstGeom prst="rect">
-            <a:avLst/>
-          </a:prstGeom>
-          <a:noFill/>
-        </p:spPr>
-        <p:txBody>
-          <a:bodyPr wrap="square" rtlCol="0">
-            <a:spAutoFit/>
-          </a:bodyPr>
-          <a:p>
-            <a:pPr algn="ctr"/>
-            <a:r>
-              <a:rPr lang="zh-CN" altLang="en-US" b="1"/>
-              <a:t>接收端用户</a:t>
-            </a:r>
-            <a:endParaRPr lang="zh-CN" altLang="en-US" b="1"/>
-          </a:p>
-        </p:txBody>
-      </p:sp>
-      <p:sp>
-        <p:nvSpPr>
-          <p:cNvPr id="6" name="矩形 5"/>
-          <p:cNvSpPr/>
-          <p:nvPr/>
-        </p:nvSpPr>
-        <p:spPr>
-          <a:xfrm>
-            <a:off x="7693660" y="486410"/>
-            <a:ext cx="1636395" cy="706755"/>
-          </a:xfrm>
-          <a:prstGeom prst="rect">
-            <a:avLst/>
-          </a:prstGeom>
-          <a:noFill/>
-          <a:ln w="22225">
-            <a:solidFill>
-              <a:schemeClr val="tx1"/>
-            </a:solidFill>
-          </a:ln>
-        </p:spPr>
-        <p:style>
-          <a:lnRef idx="2">
-            <a:schemeClr val="accent1">
-              <a:lumMod val="75000"/>
-            </a:schemeClr>
-          </a:lnRef>
-          <a:fillRef idx="1">
-            <a:schemeClr val="accent1"/>
-          </a:fillRef>
-          <a:effectRef idx="0">
-            <a:srgbClr val="FFFFFF"/>
-          </a:effectRef>
-          <a:fontRef idx="minor">
-            <a:schemeClr val="lt1"/>
-          </a:fontRef>
-        </p:style>
-        <p:txBody>
-          <a:bodyPr rtlCol="0" anchor="ctr"/>
-          <a:p>
-            <a:pPr algn="ctr"/>
-            <a:r>
               <a:rPr lang="zh-CN" altLang="en-US">
                 <a:solidFill>
                   <a:schemeClr val="tx1"/>
@@ -4665,58 +4237,14 @@
       </p:sp>
       <p:sp>
         <p:nvSpPr>
-          <p:cNvPr id="8" name="右箭头 7"/>
-          <p:cNvSpPr/>
-          <p:nvPr/>
-        </p:nvSpPr>
-        <p:spPr>
-          <a:xfrm rot="5400000" flipV="1">
-            <a:off x="9542780" y="3990975"/>
-            <a:ext cx="534035" cy="583565"/>
-          </a:xfrm>
-          <a:prstGeom prst="rightArrow">
-            <a:avLst/>
-          </a:prstGeom>
-          <a:solidFill>
-            <a:schemeClr val="accent1">
-              <a:alpha val="64000"/>
-            </a:schemeClr>
-          </a:solidFill>
-        </p:spPr>
-        <p:style>
-          <a:lnRef idx="2">
-            <a:schemeClr val="accent1">
-              <a:lumMod val="75000"/>
-            </a:schemeClr>
-          </a:lnRef>
-          <a:fillRef idx="1">
-            <a:schemeClr val="accent1"/>
-          </a:fillRef>
-          <a:effectRef idx="0">
-            <a:srgbClr val="FFFFFF"/>
-          </a:effectRef>
-          <a:fontRef idx="minor">
-            <a:schemeClr val="lt1"/>
-          </a:fontRef>
-        </p:style>
-        <p:txBody>
-          <a:bodyPr rtlCol="0" anchor="ctr"/>
-          <a:p>
-            <a:pPr algn="ctr"/>
-            <a:endParaRPr lang="zh-CN" altLang="en-US"/>
-          </a:p>
-        </p:txBody>
-      </p:sp>
-      <p:sp>
-        <p:nvSpPr>
           <p:cNvPr id="11" name="文本框 10"/>
           <p:cNvSpPr txBox="1"/>
           <p:nvPr/>
         </p:nvSpPr>
         <p:spPr>
           <a:xfrm>
-            <a:off x="3550285" y="5691505"/>
-            <a:ext cx="5549900" cy="922020"/>
+            <a:off x="3475990" y="5626100"/>
+            <a:ext cx="2419985" cy="922020"/>
           </a:xfrm>
           <a:prstGeom prst="rect">
             <a:avLst/>
@@ -4792,7 +4320,7 @@
         </p:nvSpPr>
         <p:spPr>
           <a:xfrm>
-            <a:off x="5462270" y="3803650"/>
+            <a:off x="4963795" y="1779905"/>
             <a:ext cx="2527300" cy="645160"/>
           </a:xfrm>
           <a:prstGeom prst="rect">
@@ -4866,8 +4394,8 @@
         </p:nvSpPr>
         <p:spPr>
           <a:xfrm>
-            <a:off x="4718050" y="2749550"/>
-            <a:ext cx="3481070" cy="645160"/>
+            <a:off x="2837815" y="2691130"/>
+            <a:ext cx="2596515" cy="645160"/>
           </a:xfrm>
           <a:prstGeom prst="rect">
             <a:avLst/>
@@ -4974,13 +4502,15 @@
       <p:cxnSp>
         <p:nvCxnSpPr>
           <p:cNvPr id="18" name="直接连接符 17"/>
-          <p:cNvCxnSpPr/>
+          <p:cNvCxnSpPr>
+            <a:stCxn id="29" idx="3"/>
+          </p:cNvCxnSpPr>
           <p:nvPr/>
         </p:nvCxnSpPr>
         <p:spPr>
-          <a:xfrm flipV="1">
-            <a:off x="1018540" y="790575"/>
-            <a:ext cx="5715" cy="4678045"/>
+          <a:xfrm flipH="1" flipV="1">
+            <a:off x="1024255" y="790575"/>
+            <a:ext cx="0" cy="4919980"/>
           </a:xfrm>
           <a:prstGeom prst="line">
             <a:avLst/>
@@ -5016,7 +4546,7 @@
         </p:nvCxnSpPr>
         <p:spPr>
           <a:xfrm flipH="1" flipV="1">
-            <a:off x="1018540" y="2751455"/>
+            <a:off x="1050290" y="3950970"/>
             <a:ext cx="478155" cy="1905"/>
           </a:xfrm>
           <a:prstGeom prst="line">
@@ -5054,7 +4584,7 @@
         </p:nvCxnSpPr>
         <p:spPr>
           <a:xfrm flipH="1" flipV="1">
-            <a:off x="1018540" y="5469255"/>
+            <a:off x="1018540" y="5626100"/>
             <a:ext cx="478155" cy="1905"/>
           </a:xfrm>
           <a:prstGeom prst="line">
@@ -5123,50 +4653,13 @@
       </p:cxnSp>
       <p:cxnSp>
         <p:nvCxnSpPr>
-          <p:cNvPr id="55" name="直接连接符 54"/>
-          <p:cNvCxnSpPr/>
-          <p:nvPr/>
-        </p:nvCxnSpPr>
-        <p:spPr>
-          <a:xfrm flipV="1">
-            <a:off x="11393170" y="786130"/>
-            <a:ext cx="5715" cy="4678045"/>
-          </a:xfrm>
-          <a:prstGeom prst="line">
-            <a:avLst/>
-          </a:prstGeom>
-          <a:ln w="19050">
-            <a:solidFill>
-              <a:schemeClr val="bg1">
-                <a:lumMod val="50000"/>
-              </a:schemeClr>
-            </a:solidFill>
-          </a:ln>
-        </p:spPr>
-        <p:style>
-          <a:lnRef idx="2">
-            <a:schemeClr val="accent1"/>
-          </a:lnRef>
-          <a:fillRef idx="0">
-            <a:srgbClr val="FFFFFF"/>
-          </a:fillRef>
-          <a:effectRef idx="0">
-            <a:srgbClr val="FFFFFF"/>
-          </a:effectRef>
-          <a:fontRef idx="minor">
-            <a:schemeClr val="tx1"/>
-          </a:fontRef>
-        </p:style>
-      </p:cxnSp>
-      <p:cxnSp>
-        <p:nvCxnSpPr>
           <p:cNvPr id="56" name="直接连接符 55"/>
           <p:cNvCxnSpPr/>
           <p:nvPr/>
         </p:nvCxnSpPr>
         <p:spPr>
           <a:xfrm flipV="1">
-            <a:off x="10920730" y="2749550"/>
+            <a:off x="10920730" y="3949065"/>
             <a:ext cx="478155" cy="1905"/>
           </a:xfrm>
           <a:prstGeom prst="line">
@@ -5204,15 +4697,17 @@
         </p:nvCxnSpPr>
         <p:spPr>
           <a:xfrm flipV="1">
-            <a:off x="10915015" y="5462270"/>
-            <a:ext cx="478155" cy="1905"/>
+            <a:off x="10575290" y="5705475"/>
+            <a:ext cx="823595" cy="0"/>
           </a:xfrm>
           <a:prstGeom prst="line">
             <a:avLst/>
           </a:prstGeom>
           <a:ln w="19050">
             <a:solidFill>
-              <a:srgbClr val="C00000"/>
+              <a:schemeClr val="bg1">
+                <a:lumMod val="50000"/>
+              </a:schemeClr>
             </a:solidFill>
             <a:headEnd type="triangle"/>
           </a:ln>
@@ -5373,28 +4868,61 @@
       </p:sp>
       <p:sp>
         <p:nvSpPr>
-          <p:cNvPr id="20" name="矩形 19"/>
-          <p:cNvSpPr/>
+          <p:cNvPr id="36" name="文本框 35"/>
+          <p:cNvSpPr txBox="1"/>
           <p:nvPr/>
         </p:nvSpPr>
         <p:spPr>
           <a:xfrm>
-            <a:off x="3653790" y="4357370"/>
-            <a:ext cx="1389380" cy="1105535"/>
+            <a:off x="1839595" y="447675"/>
+            <a:ext cx="1071880" cy="645160"/>
           </a:xfrm>
           <a:prstGeom prst="rect">
             <a:avLst/>
           </a:prstGeom>
+          <a:noFill/>
+        </p:spPr>
+        <p:txBody>
+          <a:bodyPr wrap="square" rtlCol="0">
+            <a:spAutoFit/>
+          </a:bodyPr>
+          <a:p>
+            <a:r>
+              <a:rPr lang="zh-CN" altLang="en-US"/>
+              <a:t>监控</a:t>
+            </a:r>
+            <a:r>
+              <a:rPr lang="en-US" altLang="zh-CN"/>
+              <a:t>/</a:t>
+            </a:r>
+            <a:r>
+              <a:rPr lang="zh-CN" altLang="en-US"/>
+              <a:t>离线配置</a:t>
+            </a:r>
+            <a:endParaRPr lang="zh-CN" altLang="en-US"/>
+          </a:p>
+        </p:txBody>
+      </p:sp>
+      <p:sp>
+        <p:nvSpPr>
+          <p:cNvPr id="33" name="圆柱形 32"/>
+          <p:cNvSpPr/>
+          <p:nvPr/>
+        </p:nvSpPr>
+        <p:spPr>
+          <a:xfrm rot="16200000">
+            <a:off x="5502275" y="1992630"/>
+            <a:ext cx="1325245" cy="4403725"/>
+          </a:xfrm>
+          <a:prstGeom prst="can">
+            <a:avLst/>
+          </a:prstGeom>
           <a:solidFill>
-            <a:schemeClr val="bg2">
-              <a:lumMod val="90000"/>
+            <a:schemeClr val="accent3">
+              <a:lumMod val="20000"/>
+              <a:lumOff val="80000"/>
             </a:schemeClr>
           </a:solidFill>
-          <a:ln w="22225">
-            <a:solidFill>
-              <a:schemeClr val="tx1"/>
-            </a:solidFill>
-          </a:ln>
         </p:spPr>
         <p:style>
           <a:lnRef idx="2">
@@ -5416,58 +4944,20 @@
           <a:bodyPr rtlCol="0" anchor="ctr"/>
           <a:p>
             <a:pPr algn="ctr"/>
-            <a:r>
-              <a:rPr lang="zh-CN" altLang="en-US">
-                <a:solidFill>
-                  <a:srgbClr val="FF0000"/>
-                </a:solidFill>
-                <a:latin typeface="Calibri" panose="020F0502020204030204" charset="0"/>
-                <a:sym typeface="+mn-ea"/>
-              </a:rPr>
-              <a:t>①</a:t>
-            </a:r>
-            <a:r>
-              <a:rPr lang="en-US" altLang="zh-CN" b="1">
-                <a:solidFill>
-                  <a:schemeClr val="tx1"/>
-                </a:solidFill>
-              </a:rPr>
-              <a:t> </a:t>
-            </a:r>
-            <a:r>
-              <a:rPr lang="zh-CN" altLang="en-US" b="1">
-                <a:solidFill>
-                  <a:schemeClr val="tx1"/>
-                </a:solidFill>
-              </a:rPr>
-              <a:t>邻域感知模块（测量与上报</a:t>
-            </a:r>
-            <a:r>
-              <a:rPr lang="zh-CN" altLang="en-US" b="1">
-                <a:solidFill>
-                  <a:schemeClr val="tx1"/>
-                </a:solidFill>
-              </a:rPr>
-              <a:t>功能）</a:t>
-            </a:r>
-            <a:endParaRPr lang="zh-CN" altLang="en-US" b="1">
-              <a:solidFill>
-                <a:schemeClr val="tx1"/>
-              </a:solidFill>
-            </a:endParaRPr>
-          </a:p>
-        </p:txBody>
-      </p:sp>
-      <p:sp>
-        <p:nvSpPr>
-          <p:cNvPr id="36" name="文本框 35"/>
+            <a:endParaRPr lang="zh-CN" altLang="en-US"/>
+          </a:p>
+        </p:txBody>
+      </p:sp>
+      <p:sp>
+        <p:nvSpPr>
+          <p:cNvPr id="41" name="文本框 40"/>
           <p:cNvSpPr txBox="1"/>
           <p:nvPr/>
         </p:nvSpPr>
         <p:spPr>
           <a:xfrm>
-            <a:off x="1839595" y="447675"/>
-            <a:ext cx="1071880" cy="645160"/>
+            <a:off x="6015990" y="3872230"/>
+            <a:ext cx="2921000" cy="645160"/>
           </a:xfrm>
           <a:prstGeom prst="rect">
             <a:avLst/>
@@ -5479,79 +4969,48 @@
             <a:spAutoFit/>
           </a:bodyPr>
           <a:p>
+            <a:pPr algn="ctr"/>
             <a:r>
               <a:rPr lang="zh-CN" altLang="en-US"/>
-              <a:t>监控</a:t>
-            </a:r>
-            <a:r>
-              <a:rPr lang="en-US" altLang="zh-CN"/>
-              <a:t>/</a:t>
-            </a:r>
+              <a:t>星间</a:t>
+            </a:r>
+            <a:endParaRPr lang="zh-CN" altLang="en-US"/>
+          </a:p>
+          <a:p>
+            <a:pPr algn="ctr"/>
             <a:r>
               <a:rPr lang="zh-CN" altLang="en-US"/>
-              <a:t>离线配置</a:t>
-            </a:r>
-            <a:endParaRPr lang="zh-CN" altLang="en-US"/>
-          </a:p>
-        </p:txBody>
-      </p:sp>
-      <p:cxnSp>
-        <p:nvCxnSpPr>
-          <p:cNvPr id="37" name="直接箭头连接符 36"/>
-          <p:cNvCxnSpPr/>
-          <p:nvPr/>
-        </p:nvCxnSpPr>
-        <p:spPr>
-          <a:xfrm flipV="1">
-            <a:off x="5094605" y="4985385"/>
-            <a:ext cx="280670" cy="0"/>
-          </a:xfrm>
-          <a:prstGeom prst="straightConnector1">
-            <a:avLst/>
-          </a:prstGeom>
-          <a:ln w="47625">
-            <a:solidFill>
-              <a:schemeClr val="bg1">
-                <a:lumMod val="50000"/>
-              </a:schemeClr>
-            </a:solidFill>
-            <a:tailEnd type="triangle"/>
-          </a:ln>
-        </p:spPr>
-        <p:style>
-          <a:lnRef idx="2">
-            <a:schemeClr val="accent1"/>
-          </a:lnRef>
-          <a:fillRef idx="0">
-            <a:srgbClr val="FFFFFF"/>
-          </a:fillRef>
-          <a:effectRef idx="0">
-            <a:srgbClr val="FFFFFF"/>
-          </a:effectRef>
-          <a:fontRef idx="minor">
-            <a:schemeClr val="tx1"/>
-          </a:fontRef>
-        </p:style>
-      </p:cxnSp>
-      <p:sp>
-        <p:nvSpPr>
-          <p:cNvPr id="48" name="右箭头 47"/>
+              <a:t>多跳传输</a:t>
+            </a:r>
+            <a:endParaRPr lang="zh-CN" altLang="en-US"/>
+          </a:p>
+        </p:txBody>
+      </p:sp>
+      <p:sp>
+        <p:nvSpPr>
+          <p:cNvPr id="20" name="矩形 19"/>
           <p:cNvSpPr/>
           <p:nvPr/>
         </p:nvSpPr>
         <p:spPr>
-          <a:xfrm rot="2220000">
-            <a:off x="3966210" y="3914775"/>
-            <a:ext cx="1562100" cy="583565"/>
-          </a:xfrm>
-          <a:prstGeom prst="rightArrow">
+          <a:xfrm>
+            <a:off x="4425315" y="3619500"/>
+            <a:ext cx="1605915" cy="1105535"/>
+          </a:xfrm>
+          <a:prstGeom prst="rect">
             <a:avLst/>
           </a:prstGeom>
           <a:solidFill>
-            <a:schemeClr val="accent1">
-              <a:alpha val="64000"/>
+            <a:schemeClr val="accent3">
+              <a:lumMod val="40000"/>
+              <a:lumOff val="60000"/>
             </a:schemeClr>
           </a:solidFill>
+          <a:ln w="22225">
+            <a:solidFill>
+              <a:schemeClr val="tx1"/>
+            </a:solidFill>
+          </a:ln>
         </p:spPr>
         <p:style>
           <a:lnRef idx="2">
@@ -5573,10 +5032,501 @@
           <a:bodyPr rtlCol="0" anchor="ctr"/>
           <a:p>
             <a:pPr algn="ctr"/>
-            <a:endParaRPr lang="zh-CN" altLang="en-US"/>
-          </a:p>
-        </p:txBody>
-      </p:sp>
+            <a:r>
+              <a:rPr lang="zh-CN" altLang="en-US">
+                <a:solidFill>
+                  <a:srgbClr val="FF0000"/>
+                </a:solidFill>
+                <a:latin typeface="Calibri" panose="020F0502020204030204" charset="0"/>
+                <a:sym typeface="+mn-ea"/>
+              </a:rPr>
+              <a:t>①</a:t>
+            </a:r>
+            <a:r>
+              <a:rPr lang="en-US" altLang="zh-CN" b="1">
+                <a:solidFill>
+                  <a:schemeClr val="tx1"/>
+                </a:solidFill>
+              </a:rPr>
+              <a:t> </a:t>
+            </a:r>
+            <a:r>
+              <a:rPr lang="zh-CN" altLang="en-US" b="1">
+                <a:solidFill>
+                  <a:schemeClr val="tx1"/>
+                </a:solidFill>
+              </a:rPr>
+              <a:t>邻域感知模块（测量与上报</a:t>
+            </a:r>
+            <a:r>
+              <a:rPr lang="zh-CN" altLang="en-US" b="1">
+                <a:solidFill>
+                  <a:schemeClr val="tx1"/>
+                </a:solidFill>
+              </a:rPr>
+              <a:t>功能）</a:t>
+            </a:r>
+            <a:endParaRPr lang="zh-CN" altLang="en-US" b="1">
+              <a:solidFill>
+                <a:schemeClr val="tx1"/>
+              </a:solidFill>
+            </a:endParaRPr>
+          </a:p>
+        </p:txBody>
+      </p:sp>
+      <p:cxnSp>
+        <p:nvCxnSpPr>
+          <p:cNvPr id="37" name="直接箭头连接符 36"/>
+          <p:cNvCxnSpPr/>
+          <p:nvPr/>
+        </p:nvCxnSpPr>
+        <p:spPr>
+          <a:xfrm>
+            <a:off x="6205855" y="4172585"/>
+            <a:ext cx="754380" cy="0"/>
+          </a:xfrm>
+          <a:prstGeom prst="straightConnector1">
+            <a:avLst/>
+          </a:prstGeom>
+          <a:ln w="47625">
+            <a:solidFill>
+              <a:schemeClr val="bg1">
+                <a:lumMod val="50000"/>
+              </a:schemeClr>
+            </a:solidFill>
+            <a:tailEnd type="triangle"/>
+          </a:ln>
+        </p:spPr>
+        <p:style>
+          <a:lnRef idx="2">
+            <a:schemeClr val="accent1"/>
+          </a:lnRef>
+          <a:fillRef idx="0">
+            <a:srgbClr val="FFFFFF"/>
+          </a:fillRef>
+          <a:effectRef idx="0">
+            <a:srgbClr val="FFFFFF"/>
+          </a:effectRef>
+          <a:fontRef idx="minor">
+            <a:schemeClr val="tx1"/>
+          </a:fontRef>
+        </p:style>
+      </p:cxnSp>
+      <p:sp>
+        <p:nvSpPr>
+          <p:cNvPr id="61" name="文本框 60"/>
+          <p:cNvSpPr txBox="1"/>
+          <p:nvPr/>
+        </p:nvSpPr>
+        <p:spPr>
+          <a:xfrm>
+            <a:off x="2708275" y="5029200"/>
+            <a:ext cx="923925" cy="306705"/>
+          </a:xfrm>
+          <a:prstGeom prst="rect">
+            <a:avLst/>
+          </a:prstGeom>
+          <a:noFill/>
+        </p:spPr>
+        <p:txBody>
+          <a:bodyPr wrap="square" rtlCol="0">
+            <a:spAutoFit/>
+          </a:bodyPr>
+          <a:p>
+            <a:r>
+              <a:rPr lang="zh-CN" altLang="en-US" sz="1400" b="1"/>
+              <a:t>服务链</a:t>
+            </a:r>
+            <a:endParaRPr lang="zh-CN" altLang="en-US" sz="1400" b="1"/>
+          </a:p>
+        </p:txBody>
+      </p:sp>
+      <p:sp>
+        <p:nvSpPr>
+          <p:cNvPr id="63" name="文本框 62"/>
+          <p:cNvSpPr txBox="1"/>
+          <p:nvPr/>
+        </p:nvSpPr>
+        <p:spPr>
+          <a:xfrm>
+            <a:off x="9990455" y="5002530"/>
+            <a:ext cx="923925" cy="306705"/>
+          </a:xfrm>
+          <a:prstGeom prst="rect">
+            <a:avLst/>
+          </a:prstGeom>
+          <a:noFill/>
+        </p:spPr>
+        <p:txBody>
+          <a:bodyPr wrap="square" rtlCol="0">
+            <a:spAutoFit/>
+          </a:bodyPr>
+          <a:p>
+            <a:r>
+              <a:rPr lang="zh-CN" altLang="en-US" sz="1400" b="1"/>
+              <a:t>馈电链</a:t>
+            </a:r>
+            <a:endParaRPr lang="zh-CN" altLang="en-US" sz="1400" b="1"/>
+          </a:p>
+        </p:txBody>
+      </p:sp>
+      <p:sp>
+        <p:nvSpPr>
+          <p:cNvPr id="21" name="矩形 20"/>
+          <p:cNvSpPr/>
+          <p:nvPr/>
+        </p:nvSpPr>
+        <p:spPr>
+          <a:xfrm>
+            <a:off x="1893570" y="1718310"/>
+            <a:ext cx="1636395" cy="706755"/>
+          </a:xfrm>
+          <a:prstGeom prst="rect">
+            <a:avLst/>
+          </a:prstGeom>
+          <a:solidFill>
+            <a:schemeClr val="accent5">
+              <a:lumMod val="40000"/>
+              <a:lumOff val="60000"/>
+            </a:schemeClr>
+          </a:solidFill>
+          <a:ln w="22225">
+            <a:solidFill>
+              <a:schemeClr val="tx1"/>
+            </a:solidFill>
+          </a:ln>
+        </p:spPr>
+        <p:style>
+          <a:lnRef idx="2">
+            <a:schemeClr val="accent1">
+              <a:lumMod val="75000"/>
+            </a:schemeClr>
+          </a:lnRef>
+          <a:fillRef idx="1">
+            <a:schemeClr val="accent1"/>
+          </a:fillRef>
+          <a:effectRef idx="0">
+            <a:srgbClr val="FFFFFF"/>
+          </a:effectRef>
+          <a:fontRef idx="minor">
+            <a:schemeClr val="lt1"/>
+          </a:fontRef>
+        </p:style>
+        <p:txBody>
+          <a:bodyPr rtlCol="0" anchor="ctr"/>
+          <a:p>
+            <a:pPr algn="ctr"/>
+            <a:r>
+              <a:rPr lang="zh-CN" altLang="en-US">
+                <a:solidFill>
+                  <a:schemeClr val="tx1"/>
+                </a:solidFill>
+              </a:rPr>
+              <a:t>增量</a:t>
+            </a:r>
+            <a:endParaRPr lang="zh-CN" altLang="en-US">
+              <a:solidFill>
+                <a:schemeClr val="tx1"/>
+              </a:solidFill>
+            </a:endParaRPr>
+          </a:p>
+          <a:p>
+            <a:pPr algn="ctr"/>
+            <a:r>
+              <a:rPr lang="zh-CN" altLang="en-US">
+                <a:solidFill>
+                  <a:schemeClr val="tx1"/>
+                </a:solidFill>
+              </a:rPr>
+              <a:t>语义编码</a:t>
+            </a:r>
+            <a:endParaRPr lang="zh-CN" altLang="en-US">
+              <a:solidFill>
+                <a:schemeClr val="tx1"/>
+              </a:solidFill>
+            </a:endParaRPr>
+          </a:p>
+        </p:txBody>
+      </p:sp>
+      <p:sp>
+        <p:nvSpPr>
+          <p:cNvPr id="70" name="圆柱形 69"/>
+          <p:cNvSpPr/>
+          <p:nvPr/>
+        </p:nvSpPr>
+        <p:spPr>
+          <a:xfrm rot="10800000">
+            <a:off x="2365375" y="4909820"/>
+            <a:ext cx="342900" cy="478155"/>
+          </a:xfrm>
+          <a:prstGeom prst="can">
+            <a:avLst/>
+          </a:prstGeom>
+          <a:noFill/>
+        </p:spPr>
+        <p:style>
+          <a:lnRef idx="2">
+            <a:schemeClr val="accent1">
+              <a:lumMod val="75000"/>
+            </a:schemeClr>
+          </a:lnRef>
+          <a:fillRef idx="1">
+            <a:schemeClr val="accent1"/>
+          </a:fillRef>
+          <a:effectRef idx="0">
+            <a:srgbClr val="FFFFFF"/>
+          </a:effectRef>
+          <a:fontRef idx="minor">
+            <a:schemeClr val="lt1"/>
+          </a:fontRef>
+        </p:style>
+        <p:txBody>
+          <a:bodyPr rtlCol="0" anchor="ctr"/>
+          <a:p>
+            <a:pPr algn="ctr"/>
+            <a:endParaRPr lang="zh-CN" altLang="en-US"/>
+          </a:p>
+        </p:txBody>
+      </p:sp>
+      <p:sp>
+        <p:nvSpPr>
+          <p:cNvPr id="71" name="圆柱形 70"/>
+          <p:cNvSpPr/>
+          <p:nvPr/>
+        </p:nvSpPr>
+        <p:spPr>
+          <a:xfrm rot="10800000" flipH="1" flipV="1">
+            <a:off x="9617710" y="4920615"/>
+            <a:ext cx="342900" cy="478155"/>
+          </a:xfrm>
+          <a:prstGeom prst="can">
+            <a:avLst/>
+          </a:prstGeom>
+          <a:noFill/>
+        </p:spPr>
+        <p:style>
+          <a:lnRef idx="2">
+            <a:schemeClr val="accent1">
+              <a:lumMod val="75000"/>
+            </a:schemeClr>
+          </a:lnRef>
+          <a:fillRef idx="1">
+            <a:schemeClr val="accent1"/>
+          </a:fillRef>
+          <a:effectRef idx="0">
+            <a:srgbClr val="FFFFFF"/>
+          </a:effectRef>
+          <a:fontRef idx="minor">
+            <a:schemeClr val="lt1"/>
+          </a:fontRef>
+        </p:style>
+        <p:txBody>
+          <a:bodyPr rtlCol="0" anchor="ctr"/>
+          <a:p>
+            <a:pPr algn="ctr"/>
+            <a:endParaRPr lang="zh-CN" altLang="en-US"/>
+          </a:p>
+        </p:txBody>
+      </p:sp>
+      <p:sp>
+        <p:nvSpPr>
+          <p:cNvPr id="72" name="矩形 71"/>
+          <p:cNvSpPr/>
+          <p:nvPr/>
+        </p:nvSpPr>
+        <p:spPr>
+          <a:xfrm>
+            <a:off x="1266825" y="2590800"/>
+            <a:ext cx="10014585" cy="4258310"/>
+          </a:xfrm>
+          <a:prstGeom prst="rect">
+            <a:avLst/>
+          </a:prstGeom>
+          <a:noFill/>
+          <a:ln w="19050" cmpd="sng">
+            <a:solidFill>
+              <a:schemeClr val="tx1"/>
+            </a:solidFill>
+            <a:prstDash val="sysDash"/>
+          </a:ln>
+        </p:spPr>
+        <p:style>
+          <a:lnRef idx="2">
+            <a:schemeClr val="accent1">
+              <a:lumMod val="75000"/>
+            </a:schemeClr>
+          </a:lnRef>
+          <a:fillRef idx="1">
+            <a:schemeClr val="accent1"/>
+          </a:fillRef>
+          <a:effectRef idx="0">
+            <a:srgbClr val="FFFFFF"/>
+          </a:effectRef>
+          <a:fontRef idx="minor">
+            <a:schemeClr val="lt1"/>
+          </a:fontRef>
+        </p:style>
+        <p:txBody>
+          <a:bodyPr rtlCol="0" anchor="ctr"/>
+          <a:p>
+            <a:pPr algn="ctr"/>
+            <a:endParaRPr lang="zh-CN" altLang="en-US"/>
+          </a:p>
+        </p:txBody>
+      </p:sp>
+      <p:sp>
+        <p:nvSpPr>
+          <p:cNvPr id="73" name="文本框 72"/>
+          <p:cNvSpPr txBox="1"/>
+          <p:nvPr/>
+        </p:nvSpPr>
+        <p:spPr>
+          <a:xfrm>
+            <a:off x="1293495" y="2590800"/>
+            <a:ext cx="1071880" cy="368300"/>
+          </a:xfrm>
+          <a:prstGeom prst="rect">
+            <a:avLst/>
+          </a:prstGeom>
+          <a:noFill/>
+        </p:spPr>
+        <p:txBody>
+          <a:bodyPr wrap="square" rtlCol="0">
+            <a:spAutoFit/>
+          </a:bodyPr>
+          <a:p>
+            <a:r>
+              <a:rPr lang="zh-CN" altLang="en-US" b="1"/>
+              <a:t>网络侧</a:t>
+            </a:r>
+            <a:endParaRPr lang="zh-CN" altLang="en-US" b="1"/>
+          </a:p>
+        </p:txBody>
+      </p:sp>
+      <p:sp>
+        <p:nvSpPr>
+          <p:cNvPr id="74" name="文本框 73"/>
+          <p:cNvSpPr txBox="1"/>
+          <p:nvPr/>
+        </p:nvSpPr>
+        <p:spPr>
+          <a:xfrm>
+            <a:off x="1386205" y="1602740"/>
+            <a:ext cx="598170" cy="922020"/>
+          </a:xfrm>
+          <a:prstGeom prst="rect">
+            <a:avLst/>
+          </a:prstGeom>
+          <a:noFill/>
+        </p:spPr>
+        <p:txBody>
+          <a:bodyPr wrap="square" rtlCol="0">
+            <a:spAutoFit/>
+          </a:bodyPr>
+          <a:p>
+            <a:r>
+              <a:rPr lang="zh-CN" altLang="en-US" b="1"/>
+              <a:t>应</a:t>
+            </a:r>
+            <a:endParaRPr lang="zh-CN" altLang="en-US" b="1"/>
+          </a:p>
+          <a:p>
+            <a:r>
+              <a:rPr lang="zh-CN" altLang="en-US" b="1"/>
+              <a:t>用</a:t>
+            </a:r>
+            <a:endParaRPr lang="zh-CN" altLang="en-US" b="1"/>
+          </a:p>
+          <a:p>
+            <a:r>
+              <a:rPr lang="zh-CN" altLang="en-US" b="1"/>
+              <a:t>侧</a:t>
+            </a:r>
+            <a:endParaRPr lang="zh-CN" altLang="en-US" b="1"/>
+          </a:p>
+        </p:txBody>
+      </p:sp>
+      <p:sp>
+        <p:nvSpPr>
+          <p:cNvPr id="75" name="右箭头 74"/>
+          <p:cNvSpPr/>
+          <p:nvPr/>
+        </p:nvSpPr>
+        <p:spPr>
+          <a:xfrm>
+            <a:off x="843915" y="5857875"/>
+            <a:ext cx="652780" cy="583565"/>
+          </a:xfrm>
+          <a:prstGeom prst="rightArrow">
+            <a:avLst/>
+          </a:prstGeom>
+          <a:solidFill>
+            <a:schemeClr val="accent1">
+              <a:alpha val="64000"/>
+            </a:schemeClr>
+          </a:solidFill>
+        </p:spPr>
+        <p:style>
+          <a:lnRef idx="2">
+            <a:schemeClr val="accent1">
+              <a:lumMod val="75000"/>
+            </a:schemeClr>
+          </a:lnRef>
+          <a:fillRef idx="1">
+            <a:schemeClr val="accent1"/>
+          </a:fillRef>
+          <a:effectRef idx="0">
+            <a:srgbClr val="FFFFFF"/>
+          </a:effectRef>
+          <a:fontRef idx="minor">
+            <a:schemeClr val="lt1"/>
+          </a:fontRef>
+        </p:style>
+        <p:txBody>
+          <a:bodyPr rtlCol="0" anchor="ctr"/>
+          <a:p>
+            <a:pPr algn="ctr"/>
+            <a:endParaRPr lang="zh-CN" altLang="en-US"/>
+          </a:p>
+        </p:txBody>
+      </p:sp>
+      <p:cxnSp>
+        <p:nvCxnSpPr>
+          <p:cNvPr id="4" name="直接连接符 3"/>
+          <p:cNvCxnSpPr/>
+          <p:nvPr/>
+        </p:nvCxnSpPr>
+        <p:spPr>
+          <a:xfrm flipH="1" flipV="1">
+            <a:off x="11398885" y="787400"/>
+            <a:ext cx="0" cy="4919980"/>
+          </a:xfrm>
+          <a:prstGeom prst="line">
+            <a:avLst/>
+          </a:prstGeom>
+          <a:ln w="19050">
+            <a:solidFill>
+              <a:schemeClr val="bg1">
+                <a:lumMod val="50000"/>
+              </a:schemeClr>
+            </a:solidFill>
+          </a:ln>
+        </p:spPr>
+        <p:style>
+          <a:lnRef idx="2">
+            <a:schemeClr val="accent1"/>
+          </a:lnRef>
+          <a:fillRef idx="0">
+            <a:srgbClr val="FFFFFF"/>
+          </a:fillRef>
+          <a:effectRef idx="0">
+            <a:srgbClr val="FFFFFF"/>
+          </a:effectRef>
+          <a:fontRef idx="minor">
+            <a:schemeClr val="tx1"/>
+          </a:fontRef>
+        </p:style>
+      </p:cxnSp>
     </p:spTree>
   </p:cSld>
   <p:clrMapOvr>
